--- a/koreatech-db/weeks/03주차_SQL_개요와_DDL.pptx
+++ b/koreatech-db/weeks/03주차_SQL_개요와_DDL.pptx
@@ -9214,9 +9214,9 @@
                 <a:solidFill>
                   <a:srgbClr val="7A869C"/>
                 </a:solidFill>
-                <a:latin typeface="나눔고딕코딩"/>
-                <a:ea typeface="나눔고딕코딩"/>
-                <a:cs typeface="나눔고딕코딩"/>
+                <a:latin typeface="D2Coding"/>
+                <a:ea typeface="D2Coding"/>
+                <a:cs typeface="D2Coding"/>
               </a:rPr>
               <a:t>1</a:t>
             </a:r>
@@ -9232,9 +9232,9 @@
                 <a:solidFill>
                   <a:srgbClr val="7A869C"/>
                 </a:solidFill>
-                <a:latin typeface="나눔고딕코딩"/>
-                <a:ea typeface="나눔고딕코딩"/>
-                <a:cs typeface="나눔고딕코딩"/>
+                <a:latin typeface="D2Coding"/>
+                <a:ea typeface="D2Coding"/>
+                <a:cs typeface="D2Coding"/>
               </a:rPr>
               <a:t>2</a:t>
             </a:r>
@@ -9250,9 +9250,9 @@
                 <a:solidFill>
                   <a:srgbClr val="7A869C"/>
                 </a:solidFill>
-                <a:latin typeface="나눔고딕코딩"/>
-                <a:ea typeface="나눔고딕코딩"/>
-                <a:cs typeface="나눔고딕코딩"/>
+                <a:latin typeface="D2Coding"/>
+                <a:ea typeface="D2Coding"/>
+                <a:cs typeface="D2Coding"/>
               </a:rPr>
               <a:t>3</a:t>
             </a:r>
@@ -9268,9 +9268,9 @@
                 <a:solidFill>
                   <a:srgbClr val="7A869C"/>
                 </a:solidFill>
-                <a:latin typeface="나눔고딕코딩"/>
-                <a:ea typeface="나눔고딕코딩"/>
-                <a:cs typeface="나눔고딕코딩"/>
+                <a:latin typeface="D2Coding"/>
+                <a:ea typeface="D2Coding"/>
+                <a:cs typeface="D2Coding"/>
               </a:rPr>
               <a:t>4</a:t>
             </a:r>
@@ -9286,9 +9286,9 @@
                 <a:solidFill>
                   <a:srgbClr val="7A869C"/>
                 </a:solidFill>
-                <a:latin typeface="나눔고딕코딩"/>
-                <a:ea typeface="나눔고딕코딩"/>
-                <a:cs typeface="나눔고딕코딩"/>
+                <a:latin typeface="D2Coding"/>
+                <a:ea typeface="D2Coding"/>
+                <a:cs typeface="D2Coding"/>
               </a:rPr>
               <a:t>5</a:t>
             </a:r>
@@ -9304,9 +9304,9 @@
                 <a:solidFill>
                   <a:srgbClr val="7A869C"/>
                 </a:solidFill>
-                <a:latin typeface="나눔고딕코딩"/>
-                <a:ea typeface="나눔고딕코딩"/>
-                <a:cs typeface="나눔고딕코딩"/>
+                <a:latin typeface="D2Coding"/>
+                <a:ea typeface="D2Coding"/>
+                <a:cs typeface="D2Coding"/>
               </a:rPr>
               <a:t>6</a:t>
             </a:r>
@@ -9322,9 +9322,9 @@
                 <a:solidFill>
                   <a:srgbClr val="7A869C"/>
                 </a:solidFill>
-                <a:latin typeface="나눔고딕코딩"/>
-                <a:ea typeface="나눔고딕코딩"/>
-                <a:cs typeface="나눔고딕코딩"/>
+                <a:latin typeface="D2Coding"/>
+                <a:ea typeface="D2Coding"/>
+                <a:cs typeface="D2Coding"/>
               </a:rPr>
               <a:t>7</a:t>
             </a:r>
@@ -9340,9 +9340,9 @@
                 <a:solidFill>
                   <a:srgbClr val="7A869C"/>
                 </a:solidFill>
-                <a:latin typeface="나눔고딕코딩"/>
-                <a:ea typeface="나눔고딕코딩"/>
-                <a:cs typeface="나눔고딕코딩"/>
+                <a:latin typeface="D2Coding"/>
+                <a:ea typeface="D2Coding"/>
+                <a:cs typeface="D2Coding"/>
               </a:rPr>
               <a:t>8</a:t>
             </a:r>
@@ -9358,9 +9358,9 @@
                 <a:solidFill>
                   <a:srgbClr val="7A869C"/>
                 </a:solidFill>
-                <a:latin typeface="나눔고딕코딩"/>
-                <a:ea typeface="나눔고딕코딩"/>
-                <a:cs typeface="나눔고딕코딩"/>
+                <a:latin typeface="D2Coding"/>
+                <a:ea typeface="D2Coding"/>
+                <a:cs typeface="D2Coding"/>
               </a:rPr>
               <a:t>9</a:t>
             </a:r>
@@ -9376,9 +9376,9 @@
                 <a:solidFill>
                   <a:srgbClr val="7A869C"/>
                 </a:solidFill>
-                <a:latin typeface="나눔고딕코딩"/>
-                <a:ea typeface="나눔고딕코딩"/>
-                <a:cs typeface="나눔고딕코딩"/>
+                <a:latin typeface="D2Coding"/>
+                <a:ea typeface="D2Coding"/>
+                <a:cs typeface="D2Coding"/>
               </a:rPr>
               <a:t>10</a:t>
             </a:r>
@@ -9394,9 +9394,9 @@
                 <a:solidFill>
                   <a:srgbClr val="7A869C"/>
                 </a:solidFill>
-                <a:latin typeface="나눔고딕코딩"/>
-                <a:ea typeface="나눔고딕코딩"/>
-                <a:cs typeface="나눔고딕코딩"/>
+                <a:latin typeface="D2Coding"/>
+                <a:ea typeface="D2Coding"/>
+                <a:cs typeface="D2Coding"/>
               </a:rPr>
               <a:t>11</a:t>
             </a:r>
@@ -9412,9 +9412,9 @@
                 <a:solidFill>
                   <a:srgbClr val="7A869C"/>
                 </a:solidFill>
-                <a:latin typeface="나눔고딕코딩"/>
-                <a:ea typeface="나눔고딕코딩"/>
-                <a:cs typeface="나눔고딕코딩"/>
+                <a:latin typeface="D2Coding"/>
+                <a:ea typeface="D2Coding"/>
+                <a:cs typeface="D2Coding"/>
               </a:rPr>
               <a:t>12</a:t>
             </a:r>
@@ -9430,9 +9430,9 @@
                 <a:solidFill>
                   <a:srgbClr val="7A869C"/>
                 </a:solidFill>
-                <a:latin typeface="나눔고딕코딩"/>
-                <a:ea typeface="나눔고딕코딩"/>
-                <a:cs typeface="나눔고딕코딩"/>
+                <a:latin typeface="D2Coding"/>
+                <a:ea typeface="D2Coding"/>
+                <a:cs typeface="D2Coding"/>
               </a:rPr>
               <a:t>13</a:t>
             </a:r>
@@ -9448,9 +9448,9 @@
                 <a:solidFill>
                   <a:srgbClr val="7A869C"/>
                 </a:solidFill>
-                <a:latin typeface="나눔고딕코딩"/>
-                <a:ea typeface="나눔고딕코딩"/>
-                <a:cs typeface="나눔고딕코딩"/>
+                <a:latin typeface="D2Coding"/>
+                <a:ea typeface="D2Coding"/>
+                <a:cs typeface="D2Coding"/>
               </a:rPr>
               <a:t>14</a:t>
             </a:r>
@@ -9489,9 +9489,9 @@
                 <a:solidFill>
                   <a:srgbClr val="E6EAF2"/>
                 </a:solidFill>
-                <a:latin typeface="나눔고딕코딩"/>
-                <a:ea typeface="나눔고딕코딩"/>
-                <a:cs typeface="나눔고딕코딩"/>
+                <a:latin typeface="D2Coding"/>
+                <a:ea typeface="D2Coding"/>
+                <a:cs typeface="D2Coding"/>
               </a:rPr>
               <a:t>-- 부모 행(고객·주문·직원)이 지워질 때 자식 행(주문·주문 상세)을 어떻게 할지 정하는 옵션</a:t>
             </a:r>
@@ -9507,9 +9507,9 @@
                 <a:solidFill>
                   <a:srgbClr val="E6EAF2"/>
                 </a:solidFill>
-                <a:latin typeface="나눔고딕코딩"/>
-                <a:ea typeface="나눔고딕코딩"/>
-                <a:cs typeface="나눔고딕코딩"/>
+                <a:latin typeface="D2Coding"/>
+                <a:ea typeface="D2Coding"/>
+                <a:cs typeface="D2Coding"/>
               </a:rPr>
               <a:t>-- 아래 FOREIGN KEY 세 줄은 CREATE TABLE 안에 들어가는 조각이라 단독으로는 실행되지 않는다</a:t>
             </a:r>
@@ -9525,9 +9525,9 @@
                 <a:solidFill>
                   <a:srgbClr val="E6EAF2"/>
                 </a:solidFill>
-                <a:latin typeface="나눔고딕코딩"/>
-                <a:ea typeface="나눔고딕코딩"/>
-                <a:cs typeface="나눔고딕코딩"/>
+                <a:latin typeface="D2Coding"/>
+                <a:ea typeface="D2Coding"/>
+                <a:cs typeface="D2Coding"/>
               </a:rPr>
               <a:t/>
             </a:r>
@@ -9543,9 +9543,9 @@
                 <a:solidFill>
                   <a:srgbClr val="E6EAF2"/>
                 </a:solidFill>
-                <a:latin typeface="나눔고딕코딩"/>
-                <a:ea typeface="나눔고딕코딩"/>
-                <a:cs typeface="나눔고딕코딩"/>
+                <a:latin typeface="D2Coding"/>
+                <a:ea typeface="D2Coding"/>
+                <a:cs typeface="D2Coding"/>
               </a:rPr>
               <a:t>-- RESTRICT / NO ACTION (기본값): 자식이 있으면 부모 삭제 거부</a:t>
             </a:r>
@@ -9561,9 +9561,9 @@
                 <a:solidFill>
                   <a:srgbClr val="E6EAF2"/>
                 </a:solidFill>
-                <a:latin typeface="나눔고딕코딩"/>
-                <a:ea typeface="나눔고딕코딩"/>
-                <a:cs typeface="나눔고딕코딩"/>
+                <a:latin typeface="D2Coding"/>
+                <a:ea typeface="D2Coding"/>
+                <a:cs typeface="D2Coding"/>
               </a:rPr>
               <a:t>-- 주문이 남아 있는 고객은 지울 수 없다 = 매출 기록 보호</a:t>
             </a:r>
@@ -9579,9 +9579,9 @@
                 <a:solidFill>
                   <a:srgbClr val="E6EAF2"/>
                 </a:solidFill>
-                <a:latin typeface="나눔고딕코딩"/>
-                <a:ea typeface="나눔고딕코딩"/>
-                <a:cs typeface="나눔고딕코딩"/>
+                <a:latin typeface="D2Coding"/>
+                <a:ea typeface="D2Coding"/>
+                <a:cs typeface="D2Coding"/>
               </a:rPr>
               <a:t>FOREIGN KEY (cust_id) REFERENCES customers(cust_id)</a:t>
             </a:r>
@@ -9597,9 +9597,9 @@
                 <a:solidFill>
                   <a:srgbClr val="E6EAF2"/>
                 </a:solidFill>
-                <a:latin typeface="나눔고딕코딩"/>
-                <a:ea typeface="나눔고딕코딩"/>
-                <a:cs typeface="나눔고딕코딩"/>
+                <a:latin typeface="D2Coding"/>
+                <a:ea typeface="D2Coding"/>
+                <a:cs typeface="D2Coding"/>
               </a:rPr>
               <a:t/>
             </a:r>
@@ -9615,9 +9615,9 @@
                 <a:solidFill>
                   <a:srgbClr val="E6EAF2"/>
                 </a:solidFill>
-                <a:latin typeface="나눔고딕코딩"/>
-                <a:ea typeface="나눔고딕코딩"/>
-                <a:cs typeface="나눔고딕코딩"/>
+                <a:latin typeface="D2Coding"/>
+                <a:ea typeface="D2Coding"/>
+                <a:cs typeface="D2Coding"/>
               </a:rPr>
               <a:t>-- CASCADE: 부모가 삭제되면 자식도 함께 삭제</a:t>
             </a:r>
@@ -9633,9 +9633,9 @@
                 <a:solidFill>
                   <a:srgbClr val="E6EAF2"/>
                 </a:solidFill>
-                <a:latin typeface="나눔고딕코딩"/>
-                <a:ea typeface="나눔고딕코딩"/>
-                <a:cs typeface="나눔고딕코딩"/>
+                <a:latin typeface="D2Coding"/>
+                <a:ea typeface="D2Coding"/>
+                <a:cs typeface="D2Coding"/>
               </a:rPr>
               <a:t>-- 주문이 사라지면 그 주문의 상세 줄도 의미가 없으니 함께 지운다</a:t>
             </a:r>
@@ -9651,9 +9651,9 @@
                 <a:solidFill>
                   <a:srgbClr val="E6EAF2"/>
                 </a:solidFill>
-                <a:latin typeface="나눔고딕코딩"/>
-                <a:ea typeface="나눔고딕코딩"/>
-                <a:cs typeface="나눔고딕코딩"/>
+                <a:latin typeface="D2Coding"/>
+                <a:ea typeface="D2Coding"/>
+                <a:cs typeface="D2Coding"/>
               </a:rPr>
               <a:t>FOREIGN KEY (order_id) REFERENCES orders(order_id) ON DELETE CASCADE</a:t>
             </a:r>
@@ -9669,9 +9669,9 @@
                 <a:solidFill>
                   <a:srgbClr val="E6EAF2"/>
                 </a:solidFill>
-                <a:latin typeface="나눔고딕코딩"/>
-                <a:ea typeface="나눔고딕코딩"/>
-                <a:cs typeface="나눔고딕코딩"/>
+                <a:latin typeface="D2Coding"/>
+                <a:ea typeface="D2Coding"/>
+                <a:cs typeface="D2Coding"/>
               </a:rPr>
               <a:t/>
             </a:r>
@@ -9687,9 +9687,9 @@
                 <a:solidFill>
                   <a:srgbClr val="E6EAF2"/>
                 </a:solidFill>
-                <a:latin typeface="나눔고딕코딩"/>
-                <a:ea typeface="나눔고딕코딩"/>
-                <a:cs typeface="나눔고딕코딩"/>
+                <a:latin typeface="D2Coding"/>
+                <a:ea typeface="D2Coding"/>
+                <a:cs typeface="D2Coding"/>
               </a:rPr>
               <a:t>-- SET NULL: 부모가 삭제되면 자식의 FK를 NULL로 (컬럼이 NULL 허용이어야 함)</a:t>
             </a:r>
@@ -9705,9 +9705,9 @@
                 <a:solidFill>
                   <a:srgbClr val="E6EAF2"/>
                 </a:solidFill>
-                <a:latin typeface="나눔고딕코딩"/>
-                <a:ea typeface="나눔고딕코딩"/>
-                <a:cs typeface="나눔고딕코딩"/>
+                <a:latin typeface="D2Coding"/>
+                <a:ea typeface="D2Coding"/>
+                <a:cs typeface="D2Coding"/>
               </a:rPr>
               <a:t>-- 담당 직원이 퇴사해도 주문 기록은 남기고 담당자 칸만 비운다</a:t>
             </a:r>
@@ -9723,9 +9723,9 @@
                 <a:solidFill>
                   <a:srgbClr val="E6EAF2"/>
                 </a:solidFill>
-                <a:latin typeface="나눔고딕코딩"/>
-                <a:ea typeface="나눔고딕코딩"/>
-                <a:cs typeface="나눔고딕코딩"/>
+                <a:latin typeface="D2Coding"/>
+                <a:ea typeface="D2Coding"/>
+                <a:cs typeface="D2Coding"/>
               </a:rPr>
               <a:t>FOREIGN KEY (emp_id) REFERENCES employees(emp_id) ON DELETE SET NULL</a:t>
             </a:r>
@@ -10229,9 +10229,9 @@
                 <a:solidFill>
                   <a:srgbClr val="7A869C"/>
                 </a:solidFill>
-                <a:latin typeface="나눔고딕코딩"/>
-                <a:ea typeface="나눔고딕코딩"/>
-                <a:cs typeface="나눔고딕코딩"/>
+                <a:latin typeface="D2Coding"/>
+                <a:ea typeface="D2Coding"/>
+                <a:cs typeface="D2Coding"/>
               </a:rPr>
               <a:t>1</a:t>
             </a:r>
@@ -10247,9 +10247,9 @@
                 <a:solidFill>
                   <a:srgbClr val="7A869C"/>
                 </a:solidFill>
-                <a:latin typeface="나눔고딕코딩"/>
-                <a:ea typeface="나눔고딕코딩"/>
-                <a:cs typeface="나눔고딕코딩"/>
+                <a:latin typeface="D2Coding"/>
+                <a:ea typeface="D2Coding"/>
+                <a:cs typeface="D2Coding"/>
               </a:rPr>
               <a:t>2</a:t>
             </a:r>
@@ -10265,9 +10265,9 @@
                 <a:solidFill>
                   <a:srgbClr val="7A869C"/>
                 </a:solidFill>
-                <a:latin typeface="나눔고딕코딩"/>
-                <a:ea typeface="나눔고딕코딩"/>
-                <a:cs typeface="나눔고딕코딩"/>
+                <a:latin typeface="D2Coding"/>
+                <a:ea typeface="D2Coding"/>
+                <a:cs typeface="D2Coding"/>
               </a:rPr>
               <a:t>3</a:t>
             </a:r>
@@ -10283,9 +10283,9 @@
                 <a:solidFill>
                   <a:srgbClr val="7A869C"/>
                 </a:solidFill>
-                <a:latin typeface="나눔고딕코딩"/>
-                <a:ea typeface="나눔고딕코딩"/>
-                <a:cs typeface="나눔고딕코딩"/>
+                <a:latin typeface="D2Coding"/>
+                <a:ea typeface="D2Coding"/>
+                <a:cs typeface="D2Coding"/>
               </a:rPr>
               <a:t>4</a:t>
             </a:r>
@@ -10301,9 +10301,9 @@
                 <a:solidFill>
                   <a:srgbClr val="7A869C"/>
                 </a:solidFill>
-                <a:latin typeface="나눔고딕코딩"/>
-                <a:ea typeface="나눔고딕코딩"/>
-                <a:cs typeface="나눔고딕코딩"/>
+                <a:latin typeface="D2Coding"/>
+                <a:ea typeface="D2Coding"/>
+                <a:cs typeface="D2Coding"/>
               </a:rPr>
               <a:t>5</a:t>
             </a:r>
@@ -10319,9 +10319,9 @@
                 <a:solidFill>
                   <a:srgbClr val="7A869C"/>
                 </a:solidFill>
-                <a:latin typeface="나눔고딕코딩"/>
-                <a:ea typeface="나눔고딕코딩"/>
-                <a:cs typeface="나눔고딕코딩"/>
+                <a:latin typeface="D2Coding"/>
+                <a:ea typeface="D2Coding"/>
+                <a:cs typeface="D2Coding"/>
               </a:rPr>
               <a:t>6</a:t>
             </a:r>
@@ -10360,9 +10360,9 @@
                 <a:solidFill>
                   <a:srgbClr val="E6EAF2"/>
                 </a:solidFill>
-                <a:latin typeface="나눔고딕코딩"/>
-                <a:ea typeface="나눔고딕코딩"/>
-                <a:cs typeface="나눔고딕코딩"/>
+                <a:latin typeface="D2Coding"/>
+                <a:ea typeface="D2Coding"/>
+                <a:cs typeface="D2Coding"/>
               </a:rPr>
               <a:t>-- 참조 무결성 위반 확인: 존재하지 않는 고객의 주문은 거부된다</a:t>
             </a:r>
@@ -10378,9 +10378,9 @@
                 <a:solidFill>
                   <a:srgbClr val="E6EAF2"/>
                 </a:solidFill>
-                <a:latin typeface="나눔고딕코딩"/>
-                <a:ea typeface="나눔고딕코딩"/>
-                <a:cs typeface="나눔고딕코딩"/>
+                <a:latin typeface="D2Coding"/>
+                <a:ea typeface="D2Coding"/>
+                <a:cs typeface="D2Coding"/>
               </a:rPr>
               <a:t>-- C999는 customers에 없는 고객번호 → 외래키 검사에서 걸린다</a:t>
             </a:r>
@@ -10396,9 +10396,9 @@
                 <a:solidFill>
                   <a:srgbClr val="E6EAF2"/>
                 </a:solidFill>
-                <a:latin typeface="나눔고딕코딩"/>
-                <a:ea typeface="나눔고딕코딩"/>
-                <a:cs typeface="나눔고딕코딩"/>
+                <a:latin typeface="D2Coding"/>
+                <a:ea typeface="D2Coding"/>
+                <a:cs typeface="D2Coding"/>
               </a:rPr>
               <a:t>INSERT INTO orders (cust_id, order_date) VALUES ('C999', '2026-07-01');</a:t>
             </a:r>
@@ -10414,9 +10414,9 @@
                 <a:solidFill>
                   <a:srgbClr val="E6EAF2"/>
                 </a:solidFill>
-                <a:latin typeface="나눔고딕코딩"/>
-                <a:ea typeface="나눔고딕코딩"/>
-                <a:cs typeface="나눔고딕코딩"/>
+                <a:latin typeface="D2Coding"/>
+                <a:ea typeface="D2Coding"/>
+                <a:cs typeface="D2Coding"/>
               </a:rPr>
               <a:t>-- ERROR 1452: Cannot add or update a child row:</a:t>
             </a:r>
@@ -10432,9 +10432,9 @@
                 <a:solidFill>
                   <a:srgbClr val="E6EAF2"/>
                 </a:solidFill>
-                <a:latin typeface="나눔고딕코딩"/>
-                <a:ea typeface="나눔고딕코딩"/>
-                <a:cs typeface="나눔고딕코딩"/>
+                <a:latin typeface="D2Coding"/>
+                <a:ea typeface="D2Coding"/>
+                <a:cs typeface="D2Coding"/>
               </a:rPr>
               <a:t>--   a foreign key constraint fails</a:t>
             </a:r>
@@ -10450,9 +10450,9 @@
                 <a:solidFill>
                   <a:srgbClr val="E6EAF2"/>
                 </a:solidFill>
-                <a:latin typeface="나눔고딕코딩"/>
-                <a:ea typeface="나눔고딕코딩"/>
-                <a:cs typeface="나눔고딕코딩"/>
+                <a:latin typeface="D2Coding"/>
+                <a:ea typeface="D2Coding"/>
+                <a:cs typeface="D2Coding"/>
               </a:rPr>
               <a:t>-- 이 오류가 나면 "부모 테이블에 그 값이 있는가"를 먼저 확인한다</a:t>
             </a:r>
@@ -11913,9 +11913,9 @@
                 <a:solidFill>
                   <a:srgbClr val="7A869C"/>
                 </a:solidFill>
-                <a:latin typeface="나눔고딕코딩"/>
-                <a:ea typeface="나눔고딕코딩"/>
-                <a:cs typeface="나눔고딕코딩"/>
+                <a:latin typeface="D2Coding"/>
+                <a:ea typeface="D2Coding"/>
+                <a:cs typeface="D2Coding"/>
               </a:rPr>
               <a:t>1</a:t>
             </a:r>
@@ -11931,9 +11931,9 @@
                 <a:solidFill>
                   <a:srgbClr val="7A869C"/>
                 </a:solidFill>
-                <a:latin typeface="나눔고딕코딩"/>
-                <a:ea typeface="나눔고딕코딩"/>
-                <a:cs typeface="나눔고딕코딩"/>
+                <a:latin typeface="D2Coding"/>
+                <a:ea typeface="D2Coding"/>
+                <a:cs typeface="D2Coding"/>
               </a:rPr>
               <a:t>2</a:t>
             </a:r>
@@ -11949,9 +11949,9 @@
                 <a:solidFill>
                   <a:srgbClr val="7A869C"/>
                 </a:solidFill>
-                <a:latin typeface="나눔고딕코딩"/>
-                <a:ea typeface="나눔고딕코딩"/>
-                <a:cs typeface="나눔고딕코딩"/>
+                <a:latin typeface="D2Coding"/>
+                <a:ea typeface="D2Coding"/>
+                <a:cs typeface="D2Coding"/>
               </a:rPr>
               <a:t>3</a:t>
             </a:r>
@@ -11967,9 +11967,9 @@
                 <a:solidFill>
                   <a:srgbClr val="7A869C"/>
                 </a:solidFill>
-                <a:latin typeface="나눔고딕코딩"/>
-                <a:ea typeface="나눔고딕코딩"/>
-                <a:cs typeface="나눔고딕코딩"/>
+                <a:latin typeface="D2Coding"/>
+                <a:ea typeface="D2Coding"/>
+                <a:cs typeface="D2Coding"/>
               </a:rPr>
               <a:t>4</a:t>
             </a:r>
@@ -11985,9 +11985,9 @@
                 <a:solidFill>
                   <a:srgbClr val="7A869C"/>
                 </a:solidFill>
-                <a:latin typeface="나눔고딕코딩"/>
-                <a:ea typeface="나눔고딕코딩"/>
-                <a:cs typeface="나눔고딕코딩"/>
+                <a:latin typeface="D2Coding"/>
+                <a:ea typeface="D2Coding"/>
+                <a:cs typeface="D2Coding"/>
               </a:rPr>
               <a:t>5</a:t>
             </a:r>
@@ -12003,9 +12003,9 @@
                 <a:solidFill>
                   <a:srgbClr val="7A869C"/>
                 </a:solidFill>
-                <a:latin typeface="나눔고딕코딩"/>
-                <a:ea typeface="나눔고딕코딩"/>
-                <a:cs typeface="나눔고딕코딩"/>
+                <a:latin typeface="D2Coding"/>
+                <a:ea typeface="D2Coding"/>
+                <a:cs typeface="D2Coding"/>
               </a:rPr>
               <a:t>6</a:t>
             </a:r>
@@ -12021,9 +12021,9 @@
                 <a:solidFill>
                   <a:srgbClr val="7A869C"/>
                 </a:solidFill>
-                <a:latin typeface="나눔고딕코딩"/>
-                <a:ea typeface="나눔고딕코딩"/>
-                <a:cs typeface="나눔고딕코딩"/>
+                <a:latin typeface="D2Coding"/>
+                <a:ea typeface="D2Coding"/>
+                <a:cs typeface="D2Coding"/>
               </a:rPr>
               <a:t>7</a:t>
             </a:r>
@@ -12039,9 +12039,9 @@
                 <a:solidFill>
                   <a:srgbClr val="7A869C"/>
                 </a:solidFill>
-                <a:latin typeface="나눔고딕코딩"/>
-                <a:ea typeface="나눔고딕코딩"/>
-                <a:cs typeface="나눔고딕코딩"/>
+                <a:latin typeface="D2Coding"/>
+                <a:ea typeface="D2Coding"/>
+                <a:cs typeface="D2Coding"/>
               </a:rPr>
               <a:t>8</a:t>
             </a:r>
@@ -12057,9 +12057,9 @@
                 <a:solidFill>
                   <a:srgbClr val="7A869C"/>
                 </a:solidFill>
-                <a:latin typeface="나눔고딕코딩"/>
-                <a:ea typeface="나눔고딕코딩"/>
-                <a:cs typeface="나눔고딕코딩"/>
+                <a:latin typeface="D2Coding"/>
+                <a:ea typeface="D2Coding"/>
+                <a:cs typeface="D2Coding"/>
               </a:rPr>
               <a:t>9</a:t>
             </a:r>
@@ -12075,9 +12075,9 @@
                 <a:solidFill>
                   <a:srgbClr val="7A869C"/>
                 </a:solidFill>
-                <a:latin typeface="나눔고딕코딩"/>
-                <a:ea typeface="나눔고딕코딩"/>
-                <a:cs typeface="나눔고딕코딩"/>
+                <a:latin typeface="D2Coding"/>
+                <a:ea typeface="D2Coding"/>
+                <a:cs typeface="D2Coding"/>
               </a:rPr>
               <a:t>10</a:t>
             </a:r>
@@ -12093,9 +12093,9 @@
                 <a:solidFill>
                   <a:srgbClr val="7A869C"/>
                 </a:solidFill>
-                <a:latin typeface="나눔고딕코딩"/>
-                <a:ea typeface="나눔고딕코딩"/>
-                <a:cs typeface="나눔고딕코딩"/>
+                <a:latin typeface="D2Coding"/>
+                <a:ea typeface="D2Coding"/>
+                <a:cs typeface="D2Coding"/>
               </a:rPr>
               <a:t>11</a:t>
             </a:r>
@@ -12134,9 +12134,9 @@
                 <a:solidFill>
                   <a:srgbClr val="E6EAF2"/>
                 </a:solidFill>
-                <a:latin typeface="나눔고딕코딩"/>
-                <a:ea typeface="나눔고딕코딩"/>
-                <a:cs typeface="나눔고딕코딩"/>
+                <a:latin typeface="D2Coding"/>
+                <a:ea typeface="D2Coding"/>
+                <a:cs typeface="D2Coding"/>
               </a:rPr>
               <a:t>-- ① 직원 테이블 — 다른 테이블을 참조하지 않으므로 가장 먼저 만든다</a:t>
             </a:r>
@@ -12152,9 +12152,9 @@
                 <a:solidFill>
                   <a:srgbClr val="E6EAF2"/>
                 </a:solidFill>
-                <a:latin typeface="나눔고딕코딩"/>
-                <a:ea typeface="나눔고딕코딩"/>
-                <a:cs typeface="나눔고딕코딩"/>
+                <a:latin typeface="D2Coding"/>
+                <a:ea typeface="D2Coding"/>
+                <a:cs typeface="D2Coding"/>
               </a:rPr>
               <a:t>CREATE TABLE employees (</a:t>
             </a:r>
@@ -12170,9 +12170,9 @@
                 <a:solidFill>
                   <a:srgbClr val="E6EAF2"/>
                 </a:solidFill>
-                <a:latin typeface="나눔고딕코딩"/>
-                <a:ea typeface="나눔고딕코딩"/>
-                <a:cs typeface="나눔고딕코딩"/>
+                <a:latin typeface="D2Coding"/>
+                <a:ea typeface="D2Coding"/>
+                <a:cs typeface="D2Coding"/>
               </a:rPr>
               <a:t>  emp_id     CHAR(4)     PRIMARY KEY,   -- 직원번호 'E001' 형식(항상 4글자) = 기본키, NULL·중복 불가</a:t>
             </a:r>
@@ -12188,9 +12188,9 @@
                 <a:solidFill>
                   <a:srgbClr val="E6EAF2"/>
                 </a:solidFill>
-                <a:latin typeface="나눔고딕코딩"/>
-                <a:ea typeface="나눔고딕코딩"/>
-                <a:cs typeface="나눔고딕코딩"/>
+                <a:latin typeface="D2Coding"/>
+                <a:ea typeface="D2Coding"/>
+                <a:cs typeface="D2Coding"/>
               </a:rPr>
               <a:t>  name       VARCHAR(20) NOT NULL,      -- 이름은 반드시 있어야 한다</a:t>
             </a:r>
@@ -12206,9 +12206,9 @@
                 <a:solidFill>
                   <a:srgbClr val="E6EAF2"/>
                 </a:solidFill>
-                <a:latin typeface="나눔고딕코딩"/>
-                <a:ea typeface="나눔고딕코딩"/>
-                <a:cs typeface="나눔고딕코딩"/>
+                <a:latin typeface="D2Coding"/>
+                <a:ea typeface="D2Coding"/>
+                <a:cs typeface="D2Coding"/>
               </a:rPr>
               <a:t>  dept       VARCHAR(20) NOT NULL,      -- 부서</a:t>
             </a:r>
@@ -12224,9 +12224,9 @@
                 <a:solidFill>
                   <a:srgbClr val="E6EAF2"/>
                 </a:solidFill>
-                <a:latin typeface="나눔고딕코딩"/>
-                <a:ea typeface="나눔고딕코딩"/>
-                <a:cs typeface="나눔고딕코딩"/>
+                <a:latin typeface="D2Coding"/>
+                <a:ea typeface="D2Coding"/>
+                <a:cs typeface="D2Coding"/>
               </a:rPr>
               <a:t>  position   VARCHAR(20) NOT NULL,      -- 직급</a:t>
             </a:r>
@@ -12242,9 +12242,9 @@
                 <a:solidFill>
                   <a:srgbClr val="E6EAF2"/>
                 </a:solidFill>
-                <a:latin typeface="나눔고딕코딩"/>
-                <a:ea typeface="나눔고딕코딩"/>
-                <a:cs typeface="나눔고딕코딩"/>
+                <a:latin typeface="D2Coding"/>
+                <a:ea typeface="D2Coding"/>
+                <a:cs typeface="D2Coding"/>
               </a:rPr>
               <a:t>  hire_date  DATE        NOT NULL,      -- 입사일 (YYYY-MM-DD)</a:t>
             </a:r>
@@ -12260,9 +12260,9 @@
                 <a:solidFill>
                   <a:srgbClr val="E6EAF2"/>
                 </a:solidFill>
-                <a:latin typeface="나눔고딕코딩"/>
-                <a:ea typeface="나눔고딕코딩"/>
-                <a:cs typeface="나눔고딕코딩"/>
+                <a:latin typeface="D2Coding"/>
+                <a:ea typeface="D2Coding"/>
+                <a:cs typeface="D2Coding"/>
               </a:rPr>
               <a:t>  salary     INT,                       -- 연봉: NULL 허용 (연봉 협상 중인 직원 표현)</a:t>
             </a:r>
@@ -12278,9 +12278,9 @@
                 <a:solidFill>
                   <a:srgbClr val="E6EAF2"/>
                 </a:solidFill>
-                <a:latin typeface="나눔고딕코딩"/>
-                <a:ea typeface="나눔고딕코딩"/>
-                <a:cs typeface="나눔고딕코딩"/>
+                <a:latin typeface="D2Coding"/>
+                <a:ea typeface="D2Coding"/>
+                <a:cs typeface="D2Coding"/>
               </a:rPr>
               <a:t>  manager_id CHAR(4),                   -- 상급자의 직원번호: 팀장은 상급자가 없어 NULL</a:t>
             </a:r>
@@ -12296,9 +12296,9 @@
                 <a:solidFill>
                   <a:srgbClr val="E6EAF2"/>
                 </a:solidFill>
-                <a:latin typeface="나눔고딕코딩"/>
-                <a:ea typeface="나눔고딕코딩"/>
-                <a:cs typeface="나눔고딕코딩"/>
+                <a:latin typeface="D2Coding"/>
+                <a:ea typeface="D2Coding"/>
+                <a:cs typeface="D2Coding"/>
               </a:rPr>
               <a:t>  FOREIGN KEY (manager_id) REFERENCES employees(emp_id)   -- 자기 테이블의 emp_id를 참조 (자기참조 외래키)</a:t>
             </a:r>
@@ -12314,9 +12314,9 @@
                 <a:solidFill>
                   <a:srgbClr val="E6EAF2"/>
                 </a:solidFill>
-                <a:latin typeface="나눔고딕코딩"/>
-                <a:ea typeface="나눔고딕코딩"/>
-                <a:cs typeface="나눔고딕코딩"/>
+                <a:latin typeface="D2Coding"/>
+                <a:ea typeface="D2Coding"/>
+                <a:cs typeface="D2Coding"/>
               </a:rPr>
               <a:t>);   -- 열 정의 사이는 쉼표, 마지막 줄 뒤에는 쉼표 없음</a:t>
             </a:r>
@@ -12820,9 +12820,9 @@
                 <a:solidFill>
                   <a:srgbClr val="7A869C"/>
                 </a:solidFill>
-                <a:latin typeface="나눔고딕코딩"/>
-                <a:ea typeface="나눔고딕코딩"/>
-                <a:cs typeface="나눔고딕코딩"/>
+                <a:latin typeface="D2Coding"/>
+                <a:ea typeface="D2Coding"/>
+                <a:cs typeface="D2Coding"/>
               </a:rPr>
               <a:t>1</a:t>
             </a:r>
@@ -12838,9 +12838,9 @@
                 <a:solidFill>
                   <a:srgbClr val="7A869C"/>
                 </a:solidFill>
-                <a:latin typeface="나눔고딕코딩"/>
-                <a:ea typeface="나눔고딕코딩"/>
-                <a:cs typeface="나눔고딕코딩"/>
+                <a:latin typeface="D2Coding"/>
+                <a:ea typeface="D2Coding"/>
+                <a:cs typeface="D2Coding"/>
               </a:rPr>
               <a:t>2</a:t>
             </a:r>
@@ -12856,9 +12856,9 @@
                 <a:solidFill>
                   <a:srgbClr val="7A869C"/>
                 </a:solidFill>
-                <a:latin typeface="나눔고딕코딩"/>
-                <a:ea typeface="나눔고딕코딩"/>
-                <a:cs typeface="나눔고딕코딩"/>
+                <a:latin typeface="D2Coding"/>
+                <a:ea typeface="D2Coding"/>
+                <a:cs typeface="D2Coding"/>
               </a:rPr>
               <a:t>3</a:t>
             </a:r>
@@ -12874,9 +12874,9 @@
                 <a:solidFill>
                   <a:srgbClr val="7A869C"/>
                 </a:solidFill>
-                <a:latin typeface="나눔고딕코딩"/>
-                <a:ea typeface="나눔고딕코딩"/>
-                <a:cs typeface="나눔고딕코딩"/>
+                <a:latin typeface="D2Coding"/>
+                <a:ea typeface="D2Coding"/>
+                <a:cs typeface="D2Coding"/>
               </a:rPr>
               <a:t>4</a:t>
             </a:r>
@@ -12892,9 +12892,9 @@
                 <a:solidFill>
                   <a:srgbClr val="7A869C"/>
                 </a:solidFill>
-                <a:latin typeface="나눔고딕코딩"/>
-                <a:ea typeface="나눔고딕코딩"/>
-                <a:cs typeface="나눔고딕코딩"/>
+                <a:latin typeface="D2Coding"/>
+                <a:ea typeface="D2Coding"/>
+                <a:cs typeface="D2Coding"/>
               </a:rPr>
               <a:t>5</a:t>
             </a:r>
@@ -12910,9 +12910,9 @@
                 <a:solidFill>
                   <a:srgbClr val="7A869C"/>
                 </a:solidFill>
-                <a:latin typeface="나눔고딕코딩"/>
-                <a:ea typeface="나눔고딕코딩"/>
-                <a:cs typeface="나눔고딕코딩"/>
+                <a:latin typeface="D2Coding"/>
+                <a:ea typeface="D2Coding"/>
+                <a:cs typeface="D2Coding"/>
               </a:rPr>
               <a:t>6</a:t>
             </a:r>
@@ -12928,9 +12928,9 @@
                 <a:solidFill>
                   <a:srgbClr val="7A869C"/>
                 </a:solidFill>
-                <a:latin typeface="나눔고딕코딩"/>
-                <a:ea typeface="나눔고딕코딩"/>
-                <a:cs typeface="나눔고딕코딩"/>
+                <a:latin typeface="D2Coding"/>
+                <a:ea typeface="D2Coding"/>
+                <a:cs typeface="D2Coding"/>
               </a:rPr>
               <a:t>7</a:t>
             </a:r>
@@ -12946,9 +12946,9 @@
                 <a:solidFill>
                   <a:srgbClr val="7A869C"/>
                 </a:solidFill>
-                <a:latin typeface="나눔고딕코딩"/>
-                <a:ea typeface="나눔고딕코딩"/>
-                <a:cs typeface="나눔고딕코딩"/>
+                <a:latin typeface="D2Coding"/>
+                <a:ea typeface="D2Coding"/>
+                <a:cs typeface="D2Coding"/>
               </a:rPr>
               <a:t>8</a:t>
             </a:r>
@@ -12964,9 +12964,9 @@
                 <a:solidFill>
                   <a:srgbClr val="7A869C"/>
                 </a:solidFill>
-                <a:latin typeface="나눔고딕코딩"/>
-                <a:ea typeface="나눔고딕코딩"/>
-                <a:cs typeface="나눔고딕코딩"/>
+                <a:latin typeface="D2Coding"/>
+                <a:ea typeface="D2Coding"/>
+                <a:cs typeface="D2Coding"/>
               </a:rPr>
               <a:t>9</a:t>
             </a:r>
@@ -12982,9 +12982,9 @@
                 <a:solidFill>
                   <a:srgbClr val="7A869C"/>
                 </a:solidFill>
-                <a:latin typeface="나눔고딕코딩"/>
-                <a:ea typeface="나눔고딕코딩"/>
-                <a:cs typeface="나눔고딕코딩"/>
+                <a:latin typeface="D2Coding"/>
+                <a:ea typeface="D2Coding"/>
+                <a:cs typeface="D2Coding"/>
               </a:rPr>
               <a:t>10</a:t>
             </a:r>
@@ -13023,9 +13023,9 @@
                 <a:solidFill>
                   <a:srgbClr val="E6EAF2"/>
                 </a:solidFill>
-                <a:latin typeface="나눔고딕코딩"/>
-                <a:ea typeface="나눔고딕코딩"/>
-                <a:cs typeface="나눔고딕코딩"/>
+                <a:latin typeface="D2Coding"/>
+                <a:ea typeface="D2Coding"/>
+                <a:cs typeface="D2Coding"/>
               </a:rPr>
               <a:t>-- ② 고객·상품 — 둘 다 다른 테이블을 참조하지 않는 부모 테이블이라 서로 순서는 상관없다</a:t>
             </a:r>
@@ -13041,9 +13041,9 @@
                 <a:solidFill>
                   <a:srgbClr val="E6EAF2"/>
                 </a:solidFill>
-                <a:latin typeface="나눔고딕코딩"/>
-                <a:ea typeface="나눔고딕코딩"/>
-                <a:cs typeface="나눔고딕코딩"/>
+                <a:latin typeface="D2Coding"/>
+                <a:ea typeface="D2Coding"/>
+                <a:cs typeface="D2Coding"/>
               </a:rPr>
               <a:t>CREATE TABLE customers (</a:t>
             </a:r>
@@ -13059,9 +13059,9 @@
                 <a:solidFill>
                   <a:srgbClr val="E6EAF2"/>
                 </a:solidFill>
-                <a:latin typeface="나눔고딕코딩"/>
-                <a:ea typeface="나눔고딕코딩"/>
-                <a:cs typeface="나눔고딕코딩"/>
+                <a:latin typeface="D2Coding"/>
+                <a:ea typeface="D2Coding"/>
+                <a:cs typeface="D2Coding"/>
               </a:rPr>
               <a:t>  cust_id     CHAR(4)     PRIMARY KEY,                  -- 고객번호 'C001' = 기본키</a:t>
             </a:r>
@@ -13077,9 +13077,9 @@
                 <a:solidFill>
                   <a:srgbClr val="E6EAF2"/>
                 </a:solidFill>
-                <a:latin typeface="나눔고딕코딩"/>
-                <a:ea typeface="나눔고딕코딩"/>
-                <a:cs typeface="나눔고딕코딩"/>
+                <a:latin typeface="D2Coding"/>
+                <a:ea typeface="D2Coding"/>
+                <a:cs typeface="D2Coding"/>
               </a:rPr>
               <a:t>  name        VARCHAR(20) NOT NULL,                     -- 이름 필수</a:t>
             </a:r>
@@ -13095,9 +13095,9 @@
                 <a:solidFill>
                   <a:srgbClr val="E6EAF2"/>
                 </a:solidFill>
-                <a:latin typeface="나눔고딕코딩"/>
-                <a:ea typeface="나눔고딕코딩"/>
-                <a:cs typeface="나눔고딕코딩"/>
+                <a:latin typeface="D2Coding"/>
+                <a:ea typeface="D2Coding"/>
+                <a:cs typeface="D2Coding"/>
               </a:rPr>
               <a:t>  grade       VARCHAR(10) NOT NULL DEFAULT 'SILVER',    -- 등급을 안 넣으면 자동 'SILVER' (신규 가입 규칙)</a:t>
             </a:r>
@@ -13113,9 +13113,9 @@
                 <a:solidFill>
                   <a:srgbClr val="E6EAF2"/>
                 </a:solidFill>
-                <a:latin typeface="나눔고딕코딩"/>
-                <a:ea typeface="나눔고딕코딩"/>
-                <a:cs typeface="나눔고딕코딩"/>
+                <a:latin typeface="D2Coding"/>
+                <a:ea typeface="D2Coding"/>
+                <a:cs typeface="D2Coding"/>
               </a:rPr>
               <a:t>  city        VARCHAR(20),                              -- 도시: 미입력 허용 (NULL)</a:t>
             </a:r>
@@ -13131,9 +13131,9 @@
                 <a:solidFill>
                   <a:srgbClr val="E6EAF2"/>
                 </a:solidFill>
-                <a:latin typeface="나눔고딕코딩"/>
-                <a:ea typeface="나눔고딕코딩"/>
-                <a:cs typeface="나눔고딕코딩"/>
+                <a:latin typeface="D2Coding"/>
+                <a:ea typeface="D2Coding"/>
+                <a:cs typeface="D2Coding"/>
               </a:rPr>
               <a:t>  email       VARCHAR(50) UNIQUE,                       -- 이메일 중복 금지, 단 NULL은 허용 (C005처럼 미입력 가능)</a:t>
             </a:r>
@@ -13149,9 +13149,9 @@
                 <a:solidFill>
                   <a:srgbClr val="E6EAF2"/>
                 </a:solidFill>
-                <a:latin typeface="나눔고딕코딩"/>
-                <a:ea typeface="나눔고딕코딩"/>
-                <a:cs typeface="나눔고딕코딩"/>
+                <a:latin typeface="D2Coding"/>
+                <a:ea typeface="D2Coding"/>
+                <a:cs typeface="D2Coding"/>
               </a:rPr>
               <a:t>  joined_date DATE        NOT NULL,                     -- 가입일 필수</a:t>
             </a:r>
@@ -13167,9 +13167,9 @@
                 <a:solidFill>
                   <a:srgbClr val="E6EAF2"/>
                 </a:solidFill>
-                <a:latin typeface="나눔고딕코딩"/>
-                <a:ea typeface="나눔고딕코딩"/>
-                <a:cs typeface="나눔고딕코딩"/>
+                <a:latin typeface="D2Coding"/>
+                <a:ea typeface="D2Coding"/>
+                <a:cs typeface="D2Coding"/>
               </a:rPr>
               <a:t>  points      INT         NOT NULL DEFAULT 0            -- 포인트 기본 0 (마지막 열이라 쉼표 없음)</a:t>
             </a:r>
@@ -13185,9 +13185,9 @@
                 <a:solidFill>
                   <a:srgbClr val="E6EAF2"/>
                 </a:solidFill>
-                <a:latin typeface="나눔고딕코딩"/>
-                <a:ea typeface="나눔고딕코딩"/>
-                <a:cs typeface="나눔고딕코딩"/>
+                <a:latin typeface="D2Coding"/>
+                <a:ea typeface="D2Coding"/>
+                <a:cs typeface="D2Coding"/>
               </a:rPr>
               <a:t>);</a:t>
             </a:r>
@@ -13691,9 +13691,9 @@
                 <a:solidFill>
                   <a:srgbClr val="7A869C"/>
                 </a:solidFill>
-                <a:latin typeface="나눔고딕코딩"/>
-                <a:ea typeface="나눔고딕코딩"/>
-                <a:cs typeface="나눔고딕코딩"/>
+                <a:latin typeface="D2Coding"/>
+                <a:ea typeface="D2Coding"/>
+                <a:cs typeface="D2Coding"/>
               </a:rPr>
               <a:t>12</a:t>
             </a:r>
@@ -13709,9 +13709,9 @@
                 <a:solidFill>
                   <a:srgbClr val="7A869C"/>
                 </a:solidFill>
-                <a:latin typeface="나눔고딕코딩"/>
-                <a:ea typeface="나눔고딕코딩"/>
-                <a:cs typeface="나눔고딕코딩"/>
+                <a:latin typeface="D2Coding"/>
+                <a:ea typeface="D2Coding"/>
+                <a:cs typeface="D2Coding"/>
               </a:rPr>
               <a:t>13</a:t>
             </a:r>
@@ -13727,9 +13727,9 @@
                 <a:solidFill>
                   <a:srgbClr val="7A869C"/>
                 </a:solidFill>
-                <a:latin typeface="나눔고딕코딩"/>
-                <a:ea typeface="나눔고딕코딩"/>
-                <a:cs typeface="나눔고딕코딩"/>
+                <a:latin typeface="D2Coding"/>
+                <a:ea typeface="D2Coding"/>
+                <a:cs typeface="D2Coding"/>
               </a:rPr>
               <a:t>14</a:t>
             </a:r>
@@ -13745,9 +13745,9 @@
                 <a:solidFill>
                   <a:srgbClr val="7A869C"/>
                 </a:solidFill>
-                <a:latin typeface="나눔고딕코딩"/>
-                <a:ea typeface="나눔고딕코딩"/>
-                <a:cs typeface="나눔고딕코딩"/>
+                <a:latin typeface="D2Coding"/>
+                <a:ea typeface="D2Coding"/>
+                <a:cs typeface="D2Coding"/>
               </a:rPr>
               <a:t>15</a:t>
             </a:r>
@@ -13763,9 +13763,9 @@
                 <a:solidFill>
                   <a:srgbClr val="7A869C"/>
                 </a:solidFill>
-                <a:latin typeface="나눔고딕코딩"/>
-                <a:ea typeface="나눔고딕코딩"/>
-                <a:cs typeface="나눔고딕코딩"/>
+                <a:latin typeface="D2Coding"/>
+                <a:ea typeface="D2Coding"/>
+                <a:cs typeface="D2Coding"/>
               </a:rPr>
               <a:t>16</a:t>
             </a:r>
@@ -13781,9 +13781,9 @@
                 <a:solidFill>
                   <a:srgbClr val="7A869C"/>
                 </a:solidFill>
-                <a:latin typeface="나눔고딕코딩"/>
-                <a:ea typeface="나눔고딕코딩"/>
-                <a:cs typeface="나눔고딕코딩"/>
+                <a:latin typeface="D2Coding"/>
+                <a:ea typeface="D2Coding"/>
+                <a:cs typeface="D2Coding"/>
               </a:rPr>
               <a:t>17</a:t>
             </a:r>
@@ -13799,9 +13799,9 @@
                 <a:solidFill>
                   <a:srgbClr val="7A869C"/>
                 </a:solidFill>
-                <a:latin typeface="나눔고딕코딩"/>
-                <a:ea typeface="나눔고딕코딩"/>
-                <a:cs typeface="나눔고딕코딩"/>
+                <a:latin typeface="D2Coding"/>
+                <a:ea typeface="D2Coding"/>
+                <a:cs typeface="D2Coding"/>
               </a:rPr>
               <a:t>18</a:t>
             </a:r>
@@ -13840,9 +13840,9 @@
                 <a:solidFill>
                   <a:srgbClr val="E6EAF2"/>
                 </a:solidFill>
-                <a:latin typeface="나눔고딕코딩"/>
-                <a:ea typeface="나눔고딕코딩"/>
-                <a:cs typeface="나눔고딕코딩"/>
+                <a:latin typeface="D2Coding"/>
+                <a:ea typeface="D2Coding"/>
+                <a:cs typeface="D2Coding"/>
               </a:rPr>
               <a:t>CREATE TABLE products (</a:t>
             </a:r>
@@ -13858,9 +13858,9 @@
                 <a:solidFill>
                   <a:srgbClr val="E6EAF2"/>
                 </a:solidFill>
-                <a:latin typeface="나눔고딕코딩"/>
-                <a:ea typeface="나눔고딕코딩"/>
-                <a:cs typeface="나눔고딕코딩"/>
+                <a:latin typeface="D2Coding"/>
+                <a:ea typeface="D2Coding"/>
+                <a:cs typeface="D2Coding"/>
               </a:rPr>
               <a:t>  prod_id  CHAR(4)     PRIMARY KEY,                  -- 상품번호 'P001' = 기본키</a:t>
             </a:r>
@@ -13876,9 +13876,9 @@
                 <a:solidFill>
                   <a:srgbClr val="E6EAF2"/>
                 </a:solidFill>
-                <a:latin typeface="나눔고딕코딩"/>
-                <a:ea typeface="나눔고딕코딩"/>
-                <a:cs typeface="나눔고딕코딩"/>
+                <a:latin typeface="D2Coding"/>
+                <a:ea typeface="D2Coding"/>
+                <a:cs typeface="D2Coding"/>
               </a:rPr>
               <a:t>  name     VARCHAR(50) NOT NULL,                     -- 상품명 (이름이 길 수 있어 50자)</a:t>
             </a:r>
@@ -13894,9 +13894,9 @@
                 <a:solidFill>
                   <a:srgbClr val="E6EAF2"/>
                 </a:solidFill>
-                <a:latin typeface="나눔고딕코딩"/>
-                <a:ea typeface="나눔고딕코딩"/>
-                <a:cs typeface="나눔고딕코딩"/>
+                <a:latin typeface="D2Coding"/>
+                <a:ea typeface="D2Coding"/>
+                <a:cs typeface="D2Coding"/>
               </a:rPr>
               <a:t>  category VARCHAR(20) NOT NULL,                     -- 카테고리</a:t>
             </a:r>
@@ -13912,9 +13912,9 @@
                 <a:solidFill>
                   <a:srgbClr val="E6EAF2"/>
                 </a:solidFill>
-                <a:latin typeface="나눔고딕코딩"/>
-                <a:ea typeface="나눔고딕코딩"/>
-                <a:cs typeface="나눔고딕코딩"/>
+                <a:latin typeface="D2Coding"/>
+                <a:ea typeface="D2Coding"/>
+                <a:cs typeface="D2Coding"/>
               </a:rPr>
               <a:t>  price    INT         NOT NULL CHECK (price &gt;= 0),  -- 판매가(원 단위 정수): 음수면 등록 거부</a:t>
             </a:r>
@@ -13930,9 +13930,9 @@
                 <a:solidFill>
                   <a:srgbClr val="E6EAF2"/>
                 </a:solidFill>
-                <a:latin typeface="나눔고딕코딩"/>
-                <a:ea typeface="나눔고딕코딩"/>
-                <a:cs typeface="나눔고딕코딩"/>
+                <a:latin typeface="D2Coding"/>
+                <a:ea typeface="D2Coding"/>
+                <a:cs typeface="D2Coding"/>
               </a:rPr>
               <a:t>  stock    INT         NOT NULL DEFAULT 0            -- 재고 기본 0</a:t>
             </a:r>
@@ -13948,9 +13948,9 @@
                 <a:solidFill>
                   <a:srgbClr val="E6EAF2"/>
                 </a:solidFill>
-                <a:latin typeface="나눔고딕코딩"/>
-                <a:ea typeface="나눔고딕코딩"/>
-                <a:cs typeface="나눔고딕코딩"/>
+                <a:latin typeface="D2Coding"/>
+                <a:ea typeface="D2Coding"/>
+                <a:cs typeface="D2Coding"/>
               </a:rPr>
               <a:t>);</a:t>
             </a:r>
@@ -14454,9 +14454,9 @@
                 <a:solidFill>
                   <a:srgbClr val="7A869C"/>
                 </a:solidFill>
-                <a:latin typeface="나눔고딕코딩"/>
-                <a:ea typeface="나눔고딕코딩"/>
-                <a:cs typeface="나눔고딕코딩"/>
+                <a:latin typeface="D2Coding"/>
+                <a:ea typeface="D2Coding"/>
+                <a:cs typeface="D2Coding"/>
               </a:rPr>
               <a:t>1</a:t>
             </a:r>
@@ -14472,9 +14472,9 @@
                 <a:solidFill>
                   <a:srgbClr val="7A869C"/>
                 </a:solidFill>
-                <a:latin typeface="나눔고딕코딩"/>
-                <a:ea typeface="나눔고딕코딩"/>
-                <a:cs typeface="나눔고딕코딩"/>
+                <a:latin typeface="D2Coding"/>
+                <a:ea typeface="D2Coding"/>
+                <a:cs typeface="D2Coding"/>
               </a:rPr>
               <a:t>2</a:t>
             </a:r>
@@ -14490,9 +14490,9 @@
                 <a:solidFill>
                   <a:srgbClr val="7A869C"/>
                 </a:solidFill>
-                <a:latin typeface="나눔고딕코딩"/>
-                <a:ea typeface="나눔고딕코딩"/>
-                <a:cs typeface="나눔고딕코딩"/>
+                <a:latin typeface="D2Coding"/>
+                <a:ea typeface="D2Coding"/>
+                <a:cs typeface="D2Coding"/>
               </a:rPr>
               <a:t>3</a:t>
             </a:r>
@@ -14508,9 +14508,9 @@
                 <a:solidFill>
                   <a:srgbClr val="7A869C"/>
                 </a:solidFill>
-                <a:latin typeface="나눔고딕코딩"/>
-                <a:ea typeface="나눔고딕코딩"/>
-                <a:cs typeface="나눔고딕코딩"/>
+                <a:latin typeface="D2Coding"/>
+                <a:ea typeface="D2Coding"/>
+                <a:cs typeface="D2Coding"/>
               </a:rPr>
               <a:t>4</a:t>
             </a:r>
@@ -14526,9 +14526,9 @@
                 <a:solidFill>
                   <a:srgbClr val="7A869C"/>
                 </a:solidFill>
-                <a:latin typeface="나눔고딕코딩"/>
-                <a:ea typeface="나눔고딕코딩"/>
-                <a:cs typeface="나눔고딕코딩"/>
+                <a:latin typeface="D2Coding"/>
+                <a:ea typeface="D2Coding"/>
+                <a:cs typeface="D2Coding"/>
               </a:rPr>
               <a:t>5</a:t>
             </a:r>
@@ -14544,9 +14544,9 @@
                 <a:solidFill>
                   <a:srgbClr val="7A869C"/>
                 </a:solidFill>
-                <a:latin typeface="나눔고딕코딩"/>
-                <a:ea typeface="나눔고딕코딩"/>
-                <a:cs typeface="나눔고딕코딩"/>
+                <a:latin typeface="D2Coding"/>
+                <a:ea typeface="D2Coding"/>
+                <a:cs typeface="D2Coding"/>
               </a:rPr>
               <a:t>6</a:t>
             </a:r>
@@ -14562,9 +14562,9 @@
                 <a:solidFill>
                   <a:srgbClr val="7A869C"/>
                 </a:solidFill>
-                <a:latin typeface="나눔고딕코딩"/>
-                <a:ea typeface="나눔고딕코딩"/>
-                <a:cs typeface="나눔고딕코딩"/>
+                <a:latin typeface="D2Coding"/>
+                <a:ea typeface="D2Coding"/>
+                <a:cs typeface="D2Coding"/>
               </a:rPr>
               <a:t>7</a:t>
             </a:r>
@@ -14580,9 +14580,9 @@
                 <a:solidFill>
                   <a:srgbClr val="7A869C"/>
                 </a:solidFill>
-                <a:latin typeface="나눔고딕코딩"/>
-                <a:ea typeface="나눔고딕코딩"/>
-                <a:cs typeface="나눔고딕코딩"/>
+                <a:latin typeface="D2Coding"/>
+                <a:ea typeface="D2Coding"/>
+                <a:cs typeface="D2Coding"/>
               </a:rPr>
               <a:t>8</a:t>
             </a:r>
@@ -14598,9 +14598,9 @@
                 <a:solidFill>
                   <a:srgbClr val="7A869C"/>
                 </a:solidFill>
-                <a:latin typeface="나눔고딕코딩"/>
-                <a:ea typeface="나눔고딕코딩"/>
-                <a:cs typeface="나눔고딕코딩"/>
+                <a:latin typeface="D2Coding"/>
+                <a:ea typeface="D2Coding"/>
+                <a:cs typeface="D2Coding"/>
               </a:rPr>
               <a:t>9</a:t>
             </a:r>
@@ -14616,9 +14616,9 @@
                 <a:solidFill>
                   <a:srgbClr val="7A869C"/>
                 </a:solidFill>
-                <a:latin typeface="나눔고딕코딩"/>
-                <a:ea typeface="나눔고딕코딩"/>
-                <a:cs typeface="나눔고딕코딩"/>
+                <a:latin typeface="D2Coding"/>
+                <a:ea typeface="D2Coding"/>
+                <a:cs typeface="D2Coding"/>
               </a:rPr>
               <a:t>10</a:t>
             </a:r>
@@ -14657,9 +14657,9 @@
                 <a:solidFill>
                   <a:srgbClr val="E6EAF2"/>
                 </a:solidFill>
-                <a:latin typeface="나눔고딕코딩"/>
-                <a:ea typeface="나눔고딕코딩"/>
-                <a:cs typeface="나눔고딕코딩"/>
+                <a:latin typeface="D2Coding"/>
+                <a:ea typeface="D2Coding"/>
+                <a:cs typeface="D2Coding"/>
               </a:rPr>
               <a:t>-- ③ 주문 — customers·employees가 먼저 있어야 외래키를 걸 수 있다</a:t>
             </a:r>
@@ -14675,9 +14675,9 @@
                 <a:solidFill>
                   <a:srgbClr val="E6EAF2"/>
                 </a:solidFill>
-                <a:latin typeface="나눔고딕코딩"/>
-                <a:ea typeface="나눔고딕코딩"/>
-                <a:cs typeface="나눔고딕코딩"/>
+                <a:latin typeface="D2Coding"/>
+                <a:ea typeface="D2Coding"/>
+                <a:cs typeface="D2Coding"/>
               </a:rPr>
               <a:t>CREATE TABLE orders (</a:t>
             </a:r>
@@ -14693,9 +14693,9 @@
                 <a:solidFill>
                   <a:srgbClr val="E6EAF2"/>
                 </a:solidFill>
-                <a:latin typeface="나눔고딕코딩"/>
-                <a:ea typeface="나눔고딕코딩"/>
-                <a:cs typeface="나눔고딕코딩"/>
+                <a:latin typeface="D2Coding"/>
+                <a:ea typeface="D2Coding"/>
+                <a:cs typeface="D2Coding"/>
               </a:rPr>
               <a:t>  order_id   INT         PRIMARY KEY AUTO_INCREMENT,   -- 주문번호: 값을 안 넣어도 1씩 자동 발급</a:t>
             </a:r>
@@ -14711,9 +14711,9 @@
                 <a:solidFill>
                   <a:srgbClr val="E6EAF2"/>
                 </a:solidFill>
-                <a:latin typeface="나눔고딕코딩"/>
-                <a:ea typeface="나눔고딕코딩"/>
-                <a:cs typeface="나눔고딕코딩"/>
+                <a:latin typeface="D2Coding"/>
+                <a:ea typeface="D2Coding"/>
+                <a:cs typeface="D2Coding"/>
               </a:rPr>
               <a:t>  cust_id    CHAR(4)     NOT NULL,                     -- 주문한 고객: 주문에는 반드시 고객이 있다</a:t>
             </a:r>
@@ -14729,9 +14729,9 @@
                 <a:solidFill>
                   <a:srgbClr val="E6EAF2"/>
                 </a:solidFill>
-                <a:latin typeface="나눔고딕코딩"/>
-                <a:ea typeface="나눔고딕코딩"/>
-                <a:cs typeface="나눔고딕코딩"/>
+                <a:latin typeface="D2Coding"/>
+                <a:ea typeface="D2Coding"/>
+                <a:cs typeface="D2Coding"/>
               </a:rPr>
               <a:t>  emp_id     CHAR(4),                                  -- 담당 직원: 온라인 주문은 없으므로 NULL 허용</a:t>
             </a:r>
@@ -14747,9 +14747,9 @@
                 <a:solidFill>
                   <a:srgbClr val="E6EAF2"/>
                 </a:solidFill>
-                <a:latin typeface="나눔고딕코딩"/>
-                <a:ea typeface="나눔고딕코딩"/>
-                <a:cs typeface="나눔고딕코딩"/>
+                <a:latin typeface="D2Coding"/>
+                <a:ea typeface="D2Coding"/>
+                <a:cs typeface="D2Coding"/>
               </a:rPr>
               <a:t>  order_date DATE        NOT NULL,                     -- 주문일</a:t>
             </a:r>
@@ -14765,9 +14765,9 @@
                 <a:solidFill>
                   <a:srgbClr val="E6EAF2"/>
                 </a:solidFill>
-                <a:latin typeface="나눔고딕코딩"/>
-                <a:ea typeface="나눔고딕코딩"/>
-                <a:cs typeface="나눔고딕코딩"/>
+                <a:latin typeface="D2Coding"/>
+                <a:ea typeface="D2Coding"/>
+                <a:cs typeface="D2Coding"/>
               </a:rPr>
               <a:t>  status     VARCHAR(10) NOT NULL DEFAULT '주문접수',  -- 상태를 안 넣으면 '주문접수'로 시작</a:t>
             </a:r>
@@ -14783,9 +14783,9 @@
                 <a:solidFill>
                   <a:srgbClr val="E6EAF2"/>
                 </a:solidFill>
-                <a:latin typeface="나눔고딕코딩"/>
-                <a:ea typeface="나눔고딕코딩"/>
-                <a:cs typeface="나눔고딕코딩"/>
+                <a:latin typeface="D2Coding"/>
+                <a:ea typeface="D2Coding"/>
+                <a:cs typeface="D2Coding"/>
               </a:rPr>
               <a:t>  FOREIGN KEY (cust_id) REFERENCES customers(cust_id),  -- 없는 고객의 주문은 거부 (참조 무결성)</a:t>
             </a:r>
@@ -14801,9 +14801,9 @@
                 <a:solidFill>
                   <a:srgbClr val="E6EAF2"/>
                 </a:solidFill>
-                <a:latin typeface="나눔고딕코딩"/>
-                <a:ea typeface="나눔고딕코딩"/>
-                <a:cs typeface="나눔고딕코딩"/>
+                <a:latin typeface="D2Coding"/>
+                <a:ea typeface="D2Coding"/>
+                <a:cs typeface="D2Coding"/>
               </a:rPr>
               <a:t>  FOREIGN KEY (emp_id)  REFERENCES employees(emp_id)    -- 없는 직원을 담당자로 넣을 수 없다</a:t>
             </a:r>
@@ -14819,9 +14819,9 @@
                 <a:solidFill>
                   <a:srgbClr val="E6EAF2"/>
                 </a:solidFill>
-                <a:latin typeface="나눔고딕코딩"/>
-                <a:ea typeface="나눔고딕코딩"/>
-                <a:cs typeface="나눔고딕코딩"/>
+                <a:latin typeface="D2Coding"/>
+                <a:ea typeface="D2Coding"/>
+                <a:cs typeface="D2Coding"/>
               </a:rPr>
               <a:t>) AUTO_INCREMENT = 1001;   -- 첫 주문번호를 1001부터 시작</a:t>
             </a:r>
@@ -16452,9 +16452,9 @@
                 <a:solidFill>
                   <a:srgbClr val="7A869C"/>
                 </a:solidFill>
-                <a:latin typeface="나눔고딕코딩"/>
-                <a:ea typeface="나눔고딕코딩"/>
-                <a:cs typeface="나눔고딕코딩"/>
+                <a:latin typeface="D2Coding"/>
+                <a:ea typeface="D2Coding"/>
+                <a:cs typeface="D2Coding"/>
               </a:rPr>
               <a:t>1</a:t>
             </a:r>
@@ -16470,9 +16470,9 @@
                 <a:solidFill>
                   <a:srgbClr val="7A869C"/>
                 </a:solidFill>
-                <a:latin typeface="나눔고딕코딩"/>
-                <a:ea typeface="나눔고딕코딩"/>
-                <a:cs typeface="나눔고딕코딩"/>
+                <a:latin typeface="D2Coding"/>
+                <a:ea typeface="D2Coding"/>
+                <a:cs typeface="D2Coding"/>
               </a:rPr>
               <a:t>2</a:t>
             </a:r>
@@ -16488,9 +16488,9 @@
                 <a:solidFill>
                   <a:srgbClr val="7A869C"/>
                 </a:solidFill>
-                <a:latin typeface="나눔고딕코딩"/>
-                <a:ea typeface="나눔고딕코딩"/>
-                <a:cs typeface="나눔고딕코딩"/>
+                <a:latin typeface="D2Coding"/>
+                <a:ea typeface="D2Coding"/>
+                <a:cs typeface="D2Coding"/>
               </a:rPr>
               <a:t>3</a:t>
             </a:r>
@@ -16506,9 +16506,9 @@
                 <a:solidFill>
                   <a:srgbClr val="7A869C"/>
                 </a:solidFill>
-                <a:latin typeface="나눔고딕코딩"/>
-                <a:ea typeface="나눔고딕코딩"/>
-                <a:cs typeface="나눔고딕코딩"/>
+                <a:latin typeface="D2Coding"/>
+                <a:ea typeface="D2Coding"/>
+                <a:cs typeface="D2Coding"/>
               </a:rPr>
               <a:t>4</a:t>
             </a:r>
@@ -16524,9 +16524,9 @@
                 <a:solidFill>
                   <a:srgbClr val="7A869C"/>
                 </a:solidFill>
-                <a:latin typeface="나눔고딕코딩"/>
-                <a:ea typeface="나눔고딕코딩"/>
-                <a:cs typeface="나눔고딕코딩"/>
+                <a:latin typeface="D2Coding"/>
+                <a:ea typeface="D2Coding"/>
+                <a:cs typeface="D2Coding"/>
               </a:rPr>
               <a:t>5</a:t>
             </a:r>
@@ -16542,9 +16542,9 @@
                 <a:solidFill>
                   <a:srgbClr val="7A869C"/>
                 </a:solidFill>
-                <a:latin typeface="나눔고딕코딩"/>
-                <a:ea typeface="나눔고딕코딩"/>
-                <a:cs typeface="나눔고딕코딩"/>
+                <a:latin typeface="D2Coding"/>
+                <a:ea typeface="D2Coding"/>
+                <a:cs typeface="D2Coding"/>
               </a:rPr>
               <a:t>6</a:t>
             </a:r>
@@ -16560,9 +16560,9 @@
                 <a:solidFill>
                   <a:srgbClr val="7A869C"/>
                 </a:solidFill>
-                <a:latin typeface="나눔고딕코딩"/>
-                <a:ea typeface="나눔고딕코딩"/>
-                <a:cs typeface="나눔고딕코딩"/>
+                <a:latin typeface="D2Coding"/>
+                <a:ea typeface="D2Coding"/>
+                <a:cs typeface="D2Coding"/>
               </a:rPr>
               <a:t>7</a:t>
             </a:r>
@@ -16578,9 +16578,9 @@
                 <a:solidFill>
                   <a:srgbClr val="7A869C"/>
                 </a:solidFill>
-                <a:latin typeface="나눔고딕코딩"/>
-                <a:ea typeface="나눔고딕코딩"/>
-                <a:cs typeface="나눔고딕코딩"/>
+                <a:latin typeface="D2Coding"/>
+                <a:ea typeface="D2Coding"/>
+                <a:cs typeface="D2Coding"/>
               </a:rPr>
               <a:t>8</a:t>
             </a:r>
@@ -16596,9 +16596,9 @@
                 <a:solidFill>
                   <a:srgbClr val="7A869C"/>
                 </a:solidFill>
-                <a:latin typeface="나눔고딕코딩"/>
-                <a:ea typeface="나눔고딕코딩"/>
-                <a:cs typeface="나눔고딕코딩"/>
+                <a:latin typeface="D2Coding"/>
+                <a:ea typeface="D2Coding"/>
+                <a:cs typeface="D2Coding"/>
               </a:rPr>
               <a:t>9</a:t>
             </a:r>
@@ -16614,9 +16614,9 @@
                 <a:solidFill>
                   <a:srgbClr val="7A869C"/>
                 </a:solidFill>
-                <a:latin typeface="나눔고딕코딩"/>
-                <a:ea typeface="나눔고딕코딩"/>
-                <a:cs typeface="나눔고딕코딩"/>
+                <a:latin typeface="D2Coding"/>
+                <a:ea typeface="D2Coding"/>
+                <a:cs typeface="D2Coding"/>
               </a:rPr>
               <a:t>10</a:t>
             </a:r>
@@ -16655,9 +16655,9 @@
                 <a:solidFill>
                   <a:srgbClr val="E6EAF2"/>
                 </a:solidFill>
-                <a:latin typeface="나눔고딕코딩"/>
-                <a:ea typeface="나눔고딕코딩"/>
-                <a:cs typeface="나눔고딕코딩"/>
+                <a:latin typeface="D2Coding"/>
+                <a:ea typeface="D2Coding"/>
+                <a:cs typeface="D2Coding"/>
               </a:rPr>
               <a:t>-- ④ 주문 상세 — orders·products 둘을 참조하므로 가장 마지막에 만든다</a:t>
             </a:r>
@@ -16673,9 +16673,9 @@
                 <a:solidFill>
                   <a:srgbClr val="E6EAF2"/>
                 </a:solidFill>
-                <a:latin typeface="나눔고딕코딩"/>
-                <a:ea typeface="나눔고딕코딩"/>
-                <a:cs typeface="나눔고딕코딩"/>
+                <a:latin typeface="D2Coding"/>
+                <a:ea typeface="D2Coding"/>
+                <a:cs typeface="D2Coding"/>
               </a:rPr>
               <a:t>CREATE TABLE order_items (</a:t>
             </a:r>
@@ -16691,9 +16691,9 @@
                 <a:solidFill>
                   <a:srgbClr val="E6EAF2"/>
                 </a:solidFill>
-                <a:latin typeface="나눔고딕코딩"/>
-                <a:ea typeface="나눔고딕코딩"/>
-                <a:cs typeface="나눔고딕코딩"/>
+                <a:latin typeface="D2Coding"/>
+                <a:ea typeface="D2Coding"/>
+                <a:cs typeface="D2Coding"/>
               </a:rPr>
               <a:t>  order_id   INT     NOT NULL,                   -- 어느 주문의 줄인지</a:t>
             </a:r>
@@ -16709,9 +16709,9 @@
                 <a:solidFill>
                   <a:srgbClr val="E6EAF2"/>
                 </a:solidFill>
-                <a:latin typeface="나눔고딕코딩"/>
-                <a:ea typeface="나눔고딕코딩"/>
-                <a:cs typeface="나눔고딕코딩"/>
+                <a:latin typeface="D2Coding"/>
+                <a:ea typeface="D2Coding"/>
+                <a:cs typeface="D2Coding"/>
               </a:rPr>
               <a:t>  prod_id    CHAR(4) NOT NULL,                   -- 어떤 상품인지</a:t>
             </a:r>
@@ -16727,9 +16727,9 @@
                 <a:solidFill>
                   <a:srgbClr val="E6EAF2"/>
                 </a:solidFill>
-                <a:latin typeface="나눔고딕코딩"/>
-                <a:ea typeface="나눔고딕코딩"/>
-                <a:cs typeface="나눔고딕코딩"/>
+                <a:latin typeface="D2Coding"/>
+                <a:ea typeface="D2Coding"/>
+                <a:cs typeface="D2Coding"/>
               </a:rPr>
               <a:t>  qty        INT     NOT NULL CHECK (qty &gt; 0),   -- 수량: 0이나 음수 주문은 거부</a:t>
             </a:r>
@@ -16745,9 +16745,9 @@
                 <a:solidFill>
                   <a:srgbClr val="E6EAF2"/>
                 </a:solidFill>
-                <a:latin typeface="나눔고딕코딩"/>
-                <a:ea typeface="나눔고딕코딩"/>
-                <a:cs typeface="나눔고딕코딩"/>
+                <a:latin typeface="D2Coding"/>
+                <a:ea typeface="D2Coding"/>
+                <a:cs typeface="D2Coding"/>
               </a:rPr>
               <a:t>  unit_price INT     NOT NULL,                   -- 주문 당시 단가: 상품 가격이 나중에 바뀌어도 결제 금액은 보존</a:t>
             </a:r>
@@ -16763,9 +16763,9 @@
                 <a:solidFill>
                   <a:srgbClr val="E6EAF2"/>
                 </a:solidFill>
-                <a:latin typeface="나눔고딕코딩"/>
-                <a:ea typeface="나눔고딕코딩"/>
-                <a:cs typeface="나눔고딕코딩"/>
+                <a:latin typeface="D2Coding"/>
+                <a:ea typeface="D2Coding"/>
+                <a:cs typeface="D2Coding"/>
               </a:rPr>
               <a:t>  PRIMARY KEY (order_id, prod_id),               -- 복합키: 한 주문에 같은 상품은 한 줄만</a:t>
             </a:r>
@@ -16781,9 +16781,9 @@
                 <a:solidFill>
                   <a:srgbClr val="E6EAF2"/>
                 </a:solidFill>
-                <a:latin typeface="나눔고딕코딩"/>
-                <a:ea typeface="나눔고딕코딩"/>
-                <a:cs typeface="나눔고딕코딩"/>
+                <a:latin typeface="D2Coding"/>
+                <a:ea typeface="D2Coding"/>
+                <a:cs typeface="D2Coding"/>
               </a:rPr>
               <a:t>  FOREIGN KEY (order_id) REFERENCES orders(order_id),     -- 없는 주문번호는 거부</a:t>
             </a:r>
@@ -16799,9 +16799,9 @@
                 <a:solidFill>
                   <a:srgbClr val="E6EAF2"/>
                 </a:solidFill>
-                <a:latin typeface="나눔고딕코딩"/>
-                <a:ea typeface="나눔고딕코딩"/>
-                <a:cs typeface="나눔고딕코딩"/>
+                <a:latin typeface="D2Coding"/>
+                <a:ea typeface="D2Coding"/>
+                <a:cs typeface="D2Coding"/>
               </a:rPr>
               <a:t>  FOREIGN KEY (prod_id)  REFERENCES products(prod_id)     -- 없는 상품번호(P999 등)는 거부</a:t>
             </a:r>
@@ -16817,9 +16817,9 @@
                 <a:solidFill>
                   <a:srgbClr val="E6EAF2"/>
                 </a:solidFill>
-                <a:latin typeface="나눔고딕코딩"/>
-                <a:ea typeface="나눔고딕코딩"/>
-                <a:cs typeface="나눔고딕코딩"/>
+                <a:latin typeface="D2Coding"/>
+                <a:ea typeface="D2Coding"/>
+                <a:cs typeface="D2Coding"/>
               </a:rPr>
               <a:t>);</a:t>
             </a:r>
@@ -17521,9 +17521,9 @@
                 <a:solidFill>
                   <a:srgbClr val="E6EAF2"/>
                 </a:solidFill>
-                <a:latin typeface="나눔고딕코딩"/>
-                <a:ea typeface="나눔고딕코딩"/>
-                <a:cs typeface="나눔고딕코딩"/>
+                <a:latin typeface="D2Coding"/>
+                <a:ea typeface="D2Coding"/>
+                <a:cs typeface="D2Coding"/>
               </a:rPr>
               <a:t>SHOW TABLES;</a:t>
             </a:r>
@@ -17740,9 +17740,9 @@
                 <a:solidFill>
                   <a:srgbClr val="E6EAF2"/>
                 </a:solidFill>
-                <a:latin typeface="나눔고딕코딩"/>
-                <a:ea typeface="나눔고딕코딩"/>
-                <a:cs typeface="나눔고딕코딩"/>
+                <a:latin typeface="D2Coding"/>
+                <a:ea typeface="D2Coding"/>
+                <a:cs typeface="D2Coding"/>
               </a:rPr>
               <a:t>DESC orders;</a:t>
             </a:r>
@@ -17959,9 +17959,9 @@
                 <a:solidFill>
                   <a:srgbClr val="E6EAF2"/>
                 </a:solidFill>
-                <a:latin typeface="나눔고딕코딩"/>
-                <a:ea typeface="나눔고딕코딩"/>
-                <a:cs typeface="나눔고딕코딩"/>
+                <a:latin typeface="D2Coding"/>
+                <a:ea typeface="D2Coding"/>
+                <a:cs typeface="D2Coding"/>
               </a:rPr>
               <a:t>SHOW CREATE TABLE order_items;</a:t>
             </a:r>
@@ -18633,9 +18633,9 @@
                 <a:solidFill>
                   <a:srgbClr val="E6EAF2"/>
                 </a:solidFill>
-                <a:latin typeface="나눔고딕코딩"/>
-                <a:ea typeface="나눔고딕코딩"/>
-                <a:cs typeface="나눔고딕코딩"/>
+                <a:latin typeface="D2Coding"/>
+                <a:ea typeface="D2Coding"/>
+                <a:cs typeface="D2Coding"/>
               </a:rPr>
               <a:t>ALTER TABLE customers ADD COLUMN phone VARCHAR(20);</a:t>
             </a:r>
@@ -18852,9 +18852,9 @@
                 <a:solidFill>
                   <a:srgbClr val="E6EAF2"/>
                 </a:solidFill>
-                <a:latin typeface="나눔고딕코딩"/>
-                <a:ea typeface="나눔고딕코딩"/>
-                <a:cs typeface="나눔고딕코딩"/>
+                <a:latin typeface="D2Coding"/>
+                <a:ea typeface="D2Coding"/>
+                <a:cs typeface="D2Coding"/>
               </a:rPr>
               <a:t>ALTER TABLE customers ADD COLUMN birth DATE AFTER name;</a:t>
             </a:r>
@@ -19071,9 +19071,9 @@
                 <a:solidFill>
                   <a:srgbClr val="E6EAF2"/>
                 </a:solidFill>
-                <a:latin typeface="나눔고딕코딩"/>
-                <a:ea typeface="나눔고딕코딩"/>
-                <a:cs typeface="나눔고딕코딩"/>
+                <a:latin typeface="D2Coding"/>
+                <a:ea typeface="D2Coding"/>
+                <a:cs typeface="D2Coding"/>
               </a:rPr>
               <a:t>ALTER TABLE customers MODIFY COLUMN phone VARCHAR(30);</a:t>
             </a:r>
@@ -19290,9 +19290,9 @@
                 <a:solidFill>
                   <a:srgbClr val="E6EAF2"/>
                 </a:solidFill>
-                <a:latin typeface="나눔고딕코딩"/>
-                <a:ea typeface="나눔고딕코딩"/>
-                <a:cs typeface="나눔고딕코딩"/>
+                <a:latin typeface="D2Coding"/>
+                <a:ea typeface="D2Coding"/>
+                <a:cs typeface="D2Coding"/>
               </a:rPr>
               <a:t>ALTER TABLE customers CHANGE COLUMN phone mobile VARCHAR(30);</a:t>
             </a:r>
@@ -19509,9 +19509,9 @@
                 <a:solidFill>
                   <a:srgbClr val="E6EAF2"/>
                 </a:solidFill>
-                <a:latin typeface="나눔고딕코딩"/>
-                <a:ea typeface="나눔고딕코딩"/>
-                <a:cs typeface="나눔고딕코딩"/>
+                <a:latin typeface="D2Coding"/>
+                <a:ea typeface="D2Coding"/>
+                <a:cs typeface="D2Coding"/>
               </a:rPr>
               <a:t>ALTER TABLE customers RENAME COLUMN mobile TO phone;</a:t>
             </a:r>
@@ -19728,9 +19728,9 @@
                 <a:solidFill>
                   <a:srgbClr val="E6EAF2"/>
                 </a:solidFill>
-                <a:latin typeface="나눔고딕코딩"/>
-                <a:ea typeface="나눔고딕코딩"/>
-                <a:cs typeface="나눔고딕코딩"/>
+                <a:latin typeface="D2Coding"/>
+                <a:ea typeface="D2Coding"/>
+                <a:cs typeface="D2Coding"/>
               </a:rPr>
               <a:t>ALTER TABLE customers DROP COLUMN birth;</a:t>
             </a:r>
@@ -20204,9 +20204,9 @@
                 <a:solidFill>
                   <a:srgbClr val="7A869C"/>
                 </a:solidFill>
-                <a:latin typeface="나눔고딕코딩"/>
-                <a:ea typeface="나눔고딕코딩"/>
-                <a:cs typeface="나눔고딕코딩"/>
+                <a:latin typeface="D2Coding"/>
+                <a:ea typeface="D2Coding"/>
+                <a:cs typeface="D2Coding"/>
               </a:rPr>
               <a:t>1</a:t>
             </a:r>
@@ -20222,9 +20222,9 @@
                 <a:solidFill>
                   <a:srgbClr val="7A869C"/>
                 </a:solidFill>
-                <a:latin typeface="나눔고딕코딩"/>
-                <a:ea typeface="나눔고딕코딩"/>
-                <a:cs typeface="나눔고딕코딩"/>
+                <a:latin typeface="D2Coding"/>
+                <a:ea typeface="D2Coding"/>
+                <a:cs typeface="D2Coding"/>
               </a:rPr>
               <a:t>2</a:t>
             </a:r>
@@ -20240,9 +20240,9 @@
                 <a:solidFill>
                   <a:srgbClr val="7A869C"/>
                 </a:solidFill>
-                <a:latin typeface="나눔고딕코딩"/>
-                <a:ea typeface="나눔고딕코딩"/>
-                <a:cs typeface="나눔고딕코딩"/>
+                <a:latin typeface="D2Coding"/>
+                <a:ea typeface="D2Coding"/>
+                <a:cs typeface="D2Coding"/>
               </a:rPr>
               <a:t>3</a:t>
             </a:r>
@@ -20258,9 +20258,9 @@
                 <a:solidFill>
                   <a:srgbClr val="7A869C"/>
                 </a:solidFill>
-                <a:latin typeface="나눔고딕코딩"/>
-                <a:ea typeface="나눔고딕코딩"/>
-                <a:cs typeface="나눔고딕코딩"/>
+                <a:latin typeface="D2Coding"/>
+                <a:ea typeface="D2Coding"/>
+                <a:cs typeface="D2Coding"/>
               </a:rPr>
               <a:t>4</a:t>
             </a:r>
@@ -20276,9 +20276,9 @@
                 <a:solidFill>
                   <a:srgbClr val="7A869C"/>
                 </a:solidFill>
-                <a:latin typeface="나눔고딕코딩"/>
-                <a:ea typeface="나눔고딕코딩"/>
-                <a:cs typeface="나눔고딕코딩"/>
+                <a:latin typeface="D2Coding"/>
+                <a:ea typeface="D2Coding"/>
+                <a:cs typeface="D2Coding"/>
               </a:rPr>
               <a:t>5</a:t>
             </a:r>
@@ -20294,9 +20294,9 @@
                 <a:solidFill>
                   <a:srgbClr val="7A869C"/>
                 </a:solidFill>
-                <a:latin typeface="나눔고딕코딩"/>
-                <a:ea typeface="나눔고딕코딩"/>
-                <a:cs typeface="나눔고딕코딩"/>
+                <a:latin typeface="D2Coding"/>
+                <a:ea typeface="D2Coding"/>
+                <a:cs typeface="D2Coding"/>
               </a:rPr>
               <a:t>6</a:t>
             </a:r>
@@ -20312,9 +20312,9 @@
                 <a:solidFill>
                   <a:srgbClr val="7A869C"/>
                 </a:solidFill>
-                <a:latin typeface="나눔고딕코딩"/>
-                <a:ea typeface="나눔고딕코딩"/>
-                <a:cs typeface="나눔고딕코딩"/>
+                <a:latin typeface="D2Coding"/>
+                <a:ea typeface="D2Coding"/>
+                <a:cs typeface="D2Coding"/>
               </a:rPr>
               <a:t>7</a:t>
             </a:r>
@@ -20330,9 +20330,9 @@
                 <a:solidFill>
                   <a:srgbClr val="7A869C"/>
                 </a:solidFill>
-                <a:latin typeface="나눔고딕코딩"/>
-                <a:ea typeface="나눔고딕코딩"/>
-                <a:cs typeface="나눔고딕코딩"/>
+                <a:latin typeface="D2Coding"/>
+                <a:ea typeface="D2Coding"/>
+                <a:cs typeface="D2Coding"/>
               </a:rPr>
               <a:t>8</a:t>
             </a:r>
@@ -20348,9 +20348,9 @@
                 <a:solidFill>
                   <a:srgbClr val="7A869C"/>
                 </a:solidFill>
-                <a:latin typeface="나눔고딕코딩"/>
-                <a:ea typeface="나눔고딕코딩"/>
-                <a:cs typeface="나눔고딕코딩"/>
+                <a:latin typeface="D2Coding"/>
+                <a:ea typeface="D2Coding"/>
+                <a:cs typeface="D2Coding"/>
               </a:rPr>
               <a:t>9</a:t>
             </a:r>
@@ -20366,9 +20366,9 @@
                 <a:solidFill>
                   <a:srgbClr val="7A869C"/>
                 </a:solidFill>
-                <a:latin typeface="나눔고딕코딩"/>
-                <a:ea typeface="나눔고딕코딩"/>
-                <a:cs typeface="나눔고딕코딩"/>
+                <a:latin typeface="D2Coding"/>
+                <a:ea typeface="D2Coding"/>
+                <a:cs typeface="D2Coding"/>
               </a:rPr>
               <a:t>10</a:t>
             </a:r>
@@ -20384,9 +20384,9 @@
                 <a:solidFill>
                   <a:srgbClr val="7A869C"/>
                 </a:solidFill>
-                <a:latin typeface="나눔고딕코딩"/>
-                <a:ea typeface="나눔고딕코딩"/>
-                <a:cs typeface="나눔고딕코딩"/>
+                <a:latin typeface="D2Coding"/>
+                <a:ea typeface="D2Coding"/>
+                <a:cs typeface="D2Coding"/>
               </a:rPr>
               <a:t>11</a:t>
             </a:r>
@@ -20402,9 +20402,9 @@
                 <a:solidFill>
                   <a:srgbClr val="7A869C"/>
                 </a:solidFill>
-                <a:latin typeface="나눔고딕코딩"/>
-                <a:ea typeface="나눔고딕코딩"/>
-                <a:cs typeface="나눔고딕코딩"/>
+                <a:latin typeface="D2Coding"/>
+                <a:ea typeface="D2Coding"/>
+                <a:cs typeface="D2Coding"/>
               </a:rPr>
               <a:t>12</a:t>
             </a:r>
@@ -20420,9 +20420,9 @@
                 <a:solidFill>
                   <a:srgbClr val="7A869C"/>
                 </a:solidFill>
-                <a:latin typeface="나눔고딕코딩"/>
-                <a:ea typeface="나눔고딕코딩"/>
-                <a:cs typeface="나눔고딕코딩"/>
+                <a:latin typeface="D2Coding"/>
+                <a:ea typeface="D2Coding"/>
+                <a:cs typeface="D2Coding"/>
               </a:rPr>
               <a:t>13</a:t>
             </a:r>
@@ -20438,9 +20438,9 @@
                 <a:solidFill>
                   <a:srgbClr val="7A869C"/>
                 </a:solidFill>
-                <a:latin typeface="나눔고딕코딩"/>
-                <a:ea typeface="나눔고딕코딩"/>
-                <a:cs typeface="나눔고딕코딩"/>
+                <a:latin typeface="D2Coding"/>
+                <a:ea typeface="D2Coding"/>
+                <a:cs typeface="D2Coding"/>
               </a:rPr>
               <a:t>14</a:t>
             </a:r>
@@ -20456,9 +20456,9 @@
                 <a:solidFill>
                   <a:srgbClr val="7A869C"/>
                 </a:solidFill>
-                <a:latin typeface="나눔고딕코딩"/>
-                <a:ea typeface="나눔고딕코딩"/>
-                <a:cs typeface="나눔고딕코딩"/>
+                <a:latin typeface="D2Coding"/>
+                <a:ea typeface="D2Coding"/>
+                <a:cs typeface="D2Coding"/>
               </a:rPr>
               <a:t>15</a:t>
             </a:r>
@@ -20497,9 +20497,9 @@
                 <a:solidFill>
                   <a:srgbClr val="E6EAF2"/>
                 </a:solidFill>
-                <a:latin typeface="나눔고딕코딩"/>
-                <a:ea typeface="나눔고딕코딩"/>
-                <a:cs typeface="나눔고딕코딩"/>
+                <a:latin typeface="D2Coding"/>
+                <a:ea typeface="D2Coding"/>
+                <a:cs typeface="D2Coding"/>
               </a:rPr>
               <a:t>ALTER TABLE products ADD CONSTRAINT ck_stock CHECK (stock &gt;= 0);</a:t>
             </a:r>
@@ -20515,9 +20515,9 @@
                 <a:solidFill>
                   <a:srgbClr val="E6EAF2"/>
                 </a:solidFill>
-                <a:latin typeface="나눔고딕코딩"/>
-                <a:ea typeface="나눔고딕코딩"/>
-                <a:cs typeface="나눔고딕코딩"/>
+                <a:latin typeface="D2Coding"/>
+                <a:ea typeface="D2Coding"/>
+                <a:cs typeface="D2Coding"/>
               </a:rPr>
               <a:t>ALTER TABLE products DROP CHECK ck_stock;</a:t>
             </a:r>
@@ -20533,9 +20533,9 @@
                 <a:solidFill>
                   <a:srgbClr val="E6EAF2"/>
                 </a:solidFill>
-                <a:latin typeface="나눔고딕코딩"/>
-                <a:ea typeface="나눔고딕코딩"/>
-                <a:cs typeface="나눔고딕코딩"/>
+                <a:latin typeface="D2Coding"/>
+                <a:ea typeface="D2Coding"/>
+                <a:cs typeface="D2Coding"/>
               </a:rPr>
               <a:t/>
             </a:r>
@@ -20551,9 +20551,9 @@
                 <a:solidFill>
                   <a:srgbClr val="E6EAF2"/>
                 </a:solidFill>
-                <a:latin typeface="나눔고딕코딩"/>
-                <a:ea typeface="나눔고딕코딩"/>
-                <a:cs typeface="나눔고딕코딩"/>
+                <a:latin typeface="D2Coding"/>
+                <a:ea typeface="D2Coding"/>
+                <a:cs typeface="D2Coding"/>
               </a:rPr>
               <a:t>ALTER TABLE customers ADD CONSTRAINT uq_phone UNIQUE (phone);</a:t>
             </a:r>
@@ -20569,9 +20569,9 @@
                 <a:solidFill>
                   <a:srgbClr val="E6EAF2"/>
                 </a:solidFill>
-                <a:latin typeface="나눔고딕코딩"/>
-                <a:ea typeface="나눔고딕코딩"/>
-                <a:cs typeface="나눔고딕코딩"/>
+                <a:latin typeface="D2Coding"/>
+                <a:ea typeface="D2Coding"/>
+                <a:cs typeface="D2Coding"/>
               </a:rPr>
               <a:t>ALTER TABLE customers DROP INDEX uq_phone;</a:t>
             </a:r>
@@ -20587,9 +20587,9 @@
                 <a:solidFill>
                   <a:srgbClr val="E6EAF2"/>
                 </a:solidFill>
-                <a:latin typeface="나눔고딕코딩"/>
-                <a:ea typeface="나눔고딕코딩"/>
-                <a:cs typeface="나눔고딕코딩"/>
+                <a:latin typeface="D2Coding"/>
+                <a:ea typeface="D2Coding"/>
+                <a:cs typeface="D2Coding"/>
               </a:rPr>
               <a:t/>
             </a:r>
@@ -20605,9 +20605,9 @@
                 <a:solidFill>
                   <a:srgbClr val="E6EAF2"/>
                 </a:solidFill>
-                <a:latin typeface="나눔고딕코딩"/>
-                <a:ea typeface="나눔고딕코딩"/>
-                <a:cs typeface="나눔고딕코딩"/>
+                <a:latin typeface="D2Coding"/>
+                <a:ea typeface="D2Coding"/>
+                <a:cs typeface="D2Coding"/>
               </a:rPr>
               <a:t>ALTER TABLE orders</a:t>
             </a:r>
@@ -20623,9 +20623,9 @@
                 <a:solidFill>
                   <a:srgbClr val="E6EAF2"/>
                 </a:solidFill>
-                <a:latin typeface="나눔고딕코딩"/>
-                <a:ea typeface="나눔고딕코딩"/>
-                <a:cs typeface="나눔고딕코딩"/>
+                <a:latin typeface="D2Coding"/>
+                <a:ea typeface="D2Coding"/>
+                <a:cs typeface="D2Coding"/>
               </a:rPr>
               <a:t>  ADD CONSTRAINT fk_orders_cust FOREIGN KEY (cust_id) REFERENCES customers(cust_id);</a:t>
             </a:r>
@@ -20641,9 +20641,9 @@
                 <a:solidFill>
                   <a:srgbClr val="E6EAF2"/>
                 </a:solidFill>
-                <a:latin typeface="나눔고딕코딩"/>
-                <a:ea typeface="나눔고딕코딩"/>
-                <a:cs typeface="나눔고딕코딩"/>
+                <a:latin typeface="D2Coding"/>
+                <a:ea typeface="D2Coding"/>
+                <a:cs typeface="D2Coding"/>
               </a:rPr>
               <a:t>ALTER TABLE orders DROP FOREIGN KEY fk_orders_cust;</a:t>
             </a:r>
@@ -20659,9 +20659,9 @@
                 <a:solidFill>
                   <a:srgbClr val="E6EAF2"/>
                 </a:solidFill>
-                <a:latin typeface="나눔고딕코딩"/>
-                <a:ea typeface="나눔고딕코딩"/>
-                <a:cs typeface="나눔고딕코딩"/>
+                <a:latin typeface="D2Coding"/>
+                <a:ea typeface="D2Coding"/>
+                <a:cs typeface="D2Coding"/>
               </a:rPr>
               <a:t/>
             </a:r>
@@ -20677,9 +20677,9 @@
                 <a:solidFill>
                   <a:srgbClr val="E6EAF2"/>
                 </a:solidFill>
-                <a:latin typeface="나눔고딕코딩"/>
-                <a:ea typeface="나눔고딕코딩"/>
-                <a:cs typeface="나눔고딕코딩"/>
+                <a:latin typeface="D2Coding"/>
+                <a:ea typeface="D2Coding"/>
+                <a:cs typeface="D2Coding"/>
               </a:rPr>
               <a:t>ALTER TABLE customers ALTER COLUMN grade SET DEFAULT 'SILVER';</a:t>
             </a:r>
@@ -20695,9 +20695,9 @@
                 <a:solidFill>
                   <a:srgbClr val="E6EAF2"/>
                 </a:solidFill>
-                <a:latin typeface="나눔고딕코딩"/>
-                <a:ea typeface="나눔고딕코딩"/>
-                <a:cs typeface="나눔고딕코딩"/>
+                <a:latin typeface="D2Coding"/>
+                <a:ea typeface="D2Coding"/>
+                <a:cs typeface="D2Coding"/>
               </a:rPr>
               <a:t>ALTER TABLE customers ALTER COLUMN grade DROP DEFAULT;</a:t>
             </a:r>
@@ -20713,9 +20713,9 @@
                 <a:solidFill>
                   <a:srgbClr val="E6EAF2"/>
                 </a:solidFill>
-                <a:latin typeface="나눔고딕코딩"/>
-                <a:ea typeface="나눔고딕코딩"/>
-                <a:cs typeface="나눔고딕코딩"/>
+                <a:latin typeface="D2Coding"/>
+                <a:ea typeface="D2Coding"/>
+                <a:cs typeface="D2Coding"/>
               </a:rPr>
               <a:t/>
             </a:r>
@@ -20731,9 +20731,9 @@
                 <a:solidFill>
                   <a:srgbClr val="E6EAF2"/>
                 </a:solidFill>
-                <a:latin typeface="나눔고딕코딩"/>
-                <a:ea typeface="나눔고딕코딩"/>
-                <a:cs typeface="나눔고딕코딩"/>
+                <a:latin typeface="D2Coding"/>
+                <a:ea typeface="D2Coding"/>
+                <a:cs typeface="D2Coding"/>
               </a:rPr>
               <a:t>ALTER TABLE customers RENAME TO members;</a:t>
             </a:r>
@@ -20749,9 +20749,9 @@
                 <a:solidFill>
                   <a:srgbClr val="E6EAF2"/>
                 </a:solidFill>
-                <a:latin typeface="나눔고딕코딩"/>
-                <a:ea typeface="나눔고딕코딩"/>
-                <a:cs typeface="나눔고딕코딩"/>
+                <a:latin typeface="D2Coding"/>
+                <a:ea typeface="D2Coding"/>
+                <a:cs typeface="D2Coding"/>
               </a:rPr>
               <a:t>ALTER TABLE members   RENAME TO customers;</a:t>
             </a:r>
@@ -33685,9 +33685,9 @@
                 <a:solidFill>
                   <a:srgbClr val="7A869C"/>
                 </a:solidFill>
-                <a:latin typeface="나눔고딕코딩"/>
-                <a:ea typeface="나눔고딕코딩"/>
-                <a:cs typeface="나눔고딕코딩"/>
+                <a:latin typeface="D2Coding"/>
+                <a:ea typeface="D2Coding"/>
+                <a:cs typeface="D2Coding"/>
               </a:rPr>
               <a:t>1</a:t>
             </a:r>
@@ -33703,9 +33703,9 @@
                 <a:solidFill>
                   <a:srgbClr val="7A869C"/>
                 </a:solidFill>
-                <a:latin typeface="나눔고딕코딩"/>
-                <a:ea typeface="나눔고딕코딩"/>
-                <a:cs typeface="나눔고딕코딩"/>
+                <a:latin typeface="D2Coding"/>
+                <a:ea typeface="D2Coding"/>
+                <a:cs typeface="D2Coding"/>
               </a:rPr>
               <a:t>2</a:t>
             </a:r>
@@ -33721,9 +33721,9 @@
                 <a:solidFill>
                   <a:srgbClr val="7A869C"/>
                 </a:solidFill>
-                <a:latin typeface="나눔고딕코딩"/>
-                <a:ea typeface="나눔고딕코딩"/>
-                <a:cs typeface="나눔고딕코딩"/>
+                <a:latin typeface="D2Coding"/>
+                <a:ea typeface="D2Coding"/>
+                <a:cs typeface="D2Coding"/>
               </a:rPr>
               <a:t>3</a:t>
             </a:r>
@@ -33739,9 +33739,9 @@
                 <a:solidFill>
                   <a:srgbClr val="7A869C"/>
                 </a:solidFill>
-                <a:latin typeface="나눔고딕코딩"/>
-                <a:ea typeface="나눔고딕코딩"/>
-                <a:cs typeface="나눔고딕코딩"/>
+                <a:latin typeface="D2Coding"/>
+                <a:ea typeface="D2Coding"/>
+                <a:cs typeface="D2Coding"/>
               </a:rPr>
               <a:t>4</a:t>
             </a:r>
@@ -33757,9 +33757,9 @@
                 <a:solidFill>
                   <a:srgbClr val="7A869C"/>
                 </a:solidFill>
-                <a:latin typeface="나눔고딕코딩"/>
-                <a:ea typeface="나눔고딕코딩"/>
-                <a:cs typeface="나눔고딕코딩"/>
+                <a:latin typeface="D2Coding"/>
+                <a:ea typeface="D2Coding"/>
+                <a:cs typeface="D2Coding"/>
               </a:rPr>
               <a:t>5</a:t>
             </a:r>
@@ -33775,9 +33775,9 @@
                 <a:solidFill>
                   <a:srgbClr val="7A869C"/>
                 </a:solidFill>
-                <a:latin typeface="나눔고딕코딩"/>
-                <a:ea typeface="나눔고딕코딩"/>
-                <a:cs typeface="나눔고딕코딩"/>
+                <a:latin typeface="D2Coding"/>
+                <a:ea typeface="D2Coding"/>
+                <a:cs typeface="D2Coding"/>
               </a:rPr>
               <a:t>6</a:t>
             </a:r>
@@ -33793,9 +33793,9 @@
                 <a:solidFill>
                   <a:srgbClr val="7A869C"/>
                 </a:solidFill>
-                <a:latin typeface="나눔고딕코딩"/>
-                <a:ea typeface="나눔고딕코딩"/>
-                <a:cs typeface="나눔고딕코딩"/>
+                <a:latin typeface="D2Coding"/>
+                <a:ea typeface="D2Coding"/>
+                <a:cs typeface="D2Coding"/>
               </a:rPr>
               <a:t>7</a:t>
             </a:r>
@@ -33811,9 +33811,9 @@
                 <a:solidFill>
                   <a:srgbClr val="7A869C"/>
                 </a:solidFill>
-                <a:latin typeface="나눔고딕코딩"/>
-                <a:ea typeface="나눔고딕코딩"/>
-                <a:cs typeface="나눔고딕코딩"/>
+                <a:latin typeface="D2Coding"/>
+                <a:ea typeface="D2Coding"/>
+                <a:cs typeface="D2Coding"/>
               </a:rPr>
               <a:t>8</a:t>
             </a:r>
@@ -33829,9 +33829,9 @@
                 <a:solidFill>
                   <a:srgbClr val="7A869C"/>
                 </a:solidFill>
-                <a:latin typeface="나눔고딕코딩"/>
-                <a:ea typeface="나눔고딕코딩"/>
-                <a:cs typeface="나눔고딕코딩"/>
+                <a:latin typeface="D2Coding"/>
+                <a:ea typeface="D2Coding"/>
+                <a:cs typeface="D2Coding"/>
               </a:rPr>
               <a:t>9</a:t>
             </a:r>
@@ -33847,9 +33847,9 @@
                 <a:solidFill>
                   <a:srgbClr val="7A869C"/>
                 </a:solidFill>
-                <a:latin typeface="나눔고딕코딩"/>
-                <a:ea typeface="나눔고딕코딩"/>
-                <a:cs typeface="나눔고딕코딩"/>
+                <a:latin typeface="D2Coding"/>
+                <a:ea typeface="D2Coding"/>
+                <a:cs typeface="D2Coding"/>
               </a:rPr>
               <a:t>10</a:t>
             </a:r>
@@ -33865,9 +33865,9 @@
                 <a:solidFill>
                   <a:srgbClr val="7A869C"/>
                 </a:solidFill>
-                <a:latin typeface="나눔고딕코딩"/>
-                <a:ea typeface="나눔고딕코딩"/>
-                <a:cs typeface="나눔고딕코딩"/>
+                <a:latin typeface="D2Coding"/>
+                <a:ea typeface="D2Coding"/>
+                <a:cs typeface="D2Coding"/>
               </a:rPr>
               <a:t>11</a:t>
             </a:r>
@@ -33906,9 +33906,9 @@
                 <a:solidFill>
                   <a:srgbClr val="E6EAF2"/>
                 </a:solidFill>
-                <a:latin typeface="나눔고딕코딩"/>
-                <a:ea typeface="나눔고딕코딩"/>
-                <a:cs typeface="나눔고딕코딩"/>
+                <a:latin typeface="D2Coding"/>
+                <a:ea typeface="D2Coding"/>
+                <a:cs typeface="D2Coding"/>
               </a:rPr>
               <a:t>-- 같은 질문을 두 가지 스타일로 써 본다: VIP 고객을 포인트 높은 순으로 조회</a:t>
             </a:r>
@@ -33924,9 +33924,9 @@
                 <a:solidFill>
                   <a:srgbClr val="E6EAF2"/>
                 </a:solidFill>
-                <a:latin typeface="나눔고딕코딩"/>
-                <a:ea typeface="나눔고딕코딩"/>
-                <a:cs typeface="나눔고딕코딩"/>
+                <a:latin typeface="D2Coding"/>
+                <a:ea typeface="D2Coding"/>
+                <a:cs typeface="D2Coding"/>
               </a:rPr>
               <a:t>-- 나쁜 예 (한 줄에 모두) — 실행은 되지만 어디가 조건이고 어디가 정렬인지 한눈에 안 보인다</a:t>
             </a:r>
@@ -33942,9 +33942,9 @@
                 <a:solidFill>
                   <a:srgbClr val="E6EAF2"/>
                 </a:solidFill>
-                <a:latin typeface="나눔고딕코딩"/>
-                <a:ea typeface="나눔고딕코딩"/>
-                <a:cs typeface="나눔고딕코딩"/>
+                <a:latin typeface="D2Coding"/>
+                <a:ea typeface="D2Coding"/>
+                <a:cs typeface="D2Coding"/>
               </a:rPr>
               <a:t>select name,grade,points from customers where grade='VIP' order by points desc;</a:t>
             </a:r>
@@ -33960,9 +33960,9 @@
                 <a:solidFill>
                   <a:srgbClr val="E6EAF2"/>
                 </a:solidFill>
-                <a:latin typeface="나눔고딕코딩"/>
-                <a:ea typeface="나눔고딕코딩"/>
-                <a:cs typeface="나눔고딕코딩"/>
+                <a:latin typeface="D2Coding"/>
+                <a:ea typeface="D2Coding"/>
+                <a:cs typeface="D2Coding"/>
               </a:rPr>
               <a:t/>
             </a:r>
@@ -33978,9 +33978,9 @@
                 <a:solidFill>
                   <a:srgbClr val="E6EAF2"/>
                 </a:solidFill>
-                <a:latin typeface="나눔고딕코딩"/>
-                <a:ea typeface="나눔고딕코딩"/>
-                <a:cs typeface="나눔고딕코딩"/>
+                <a:latin typeface="D2Coding"/>
+                <a:ea typeface="D2Coding"/>
+                <a:cs typeface="D2Coding"/>
               </a:rPr>
               <a:t>-- 좋은 예 (절 단위 줄바꿈 + 정렬) — 키워드는 대문자, 절마다 줄을 바꾼다</a:t>
             </a:r>
@@ -33996,9 +33996,9 @@
                 <a:solidFill>
                   <a:srgbClr val="E6EAF2"/>
                 </a:solidFill>
-                <a:latin typeface="나눔고딕코딩"/>
-                <a:ea typeface="나눔고딕코딩"/>
-                <a:cs typeface="나눔고딕코딩"/>
+                <a:latin typeface="D2Coding"/>
+                <a:ea typeface="D2Coding"/>
+                <a:cs typeface="D2Coding"/>
               </a:rPr>
               <a:t>SELECT name,            -- 보고 싶은 열 3개를 고른다 (이름·등급·포인트)</a:t>
             </a:r>
@@ -34014,9 +34014,9 @@
                 <a:solidFill>
                   <a:srgbClr val="E6EAF2"/>
                 </a:solidFill>
-                <a:latin typeface="나눔고딕코딩"/>
-                <a:ea typeface="나눔고딕코딩"/>
-                <a:cs typeface="나눔고딕코딩"/>
+                <a:latin typeface="D2Coding"/>
+                <a:ea typeface="D2Coding"/>
+                <a:cs typeface="D2Coding"/>
               </a:rPr>
               <a:t>       grade,</a:t>
             </a:r>
@@ -34032,9 +34032,9 @@
                 <a:solidFill>
                   <a:srgbClr val="E6EAF2"/>
                 </a:solidFill>
-                <a:latin typeface="나눔고딕코딩"/>
-                <a:ea typeface="나눔고딕코딩"/>
-                <a:cs typeface="나눔고딕코딩"/>
+                <a:latin typeface="D2Coding"/>
+                <a:ea typeface="D2Coding"/>
+                <a:cs typeface="D2Coding"/>
               </a:rPr>
               <a:t>       points</a:t>
             </a:r>
@@ -34050,9 +34050,9 @@
                 <a:solidFill>
                   <a:srgbClr val="E6EAF2"/>
                 </a:solidFill>
-                <a:latin typeface="나눔고딕코딩"/>
-                <a:ea typeface="나눔고딕코딩"/>
-                <a:cs typeface="나눔고딕코딩"/>
+                <a:latin typeface="D2Coding"/>
+                <a:ea typeface="D2Coding"/>
+                <a:cs typeface="D2Coding"/>
               </a:rPr>
               <a:t>FROM   customers        -- 어느 테이블에서 가져올지</a:t>
             </a:r>
@@ -34068,9 +34068,9 @@
                 <a:solidFill>
                   <a:srgbClr val="E6EAF2"/>
                 </a:solidFill>
-                <a:latin typeface="나눔고딕코딩"/>
-                <a:ea typeface="나눔고딕코딩"/>
-                <a:cs typeface="나눔고딕코딩"/>
+                <a:latin typeface="D2Coding"/>
+                <a:ea typeface="D2Coding"/>
+                <a:cs typeface="D2Coding"/>
               </a:rPr>
               <a:t>WHERE  grade = 'VIP'    -- 조건: 등급이 VIP인 고객만 (문자열은 작은따옴표로 감싼다)</a:t>
             </a:r>
@@ -34086,9 +34086,9 @@
                 <a:solidFill>
                   <a:srgbClr val="E6EAF2"/>
                 </a:solidFill>
-                <a:latin typeface="나눔고딕코딩"/>
-                <a:ea typeface="나눔고딕코딩"/>
-                <a:cs typeface="나눔고딕코딩"/>
+                <a:latin typeface="D2Coding"/>
+                <a:ea typeface="D2Coding"/>
+                <a:cs typeface="D2Coding"/>
               </a:rPr>
               <a:t>ORDER  BY points DESC;  -- 포인트 높은 순(내림차순)으로 정렬, 문장 끝은 세미콜론</a:t>
             </a:r>
@@ -34892,9 +34892,9 @@
                 <a:solidFill>
                   <a:srgbClr val="7A869C"/>
                 </a:solidFill>
-                <a:latin typeface="나눔고딕코딩"/>
-                <a:ea typeface="나눔고딕코딩"/>
-                <a:cs typeface="나눔고딕코딩"/>
+                <a:latin typeface="D2Coding"/>
+                <a:ea typeface="D2Coding"/>
+                <a:cs typeface="D2Coding"/>
               </a:rPr>
               <a:t>1</a:t>
             </a:r>
@@ -34910,9 +34910,9 @@
                 <a:solidFill>
                   <a:srgbClr val="7A869C"/>
                 </a:solidFill>
-                <a:latin typeface="나눔고딕코딩"/>
-                <a:ea typeface="나눔고딕코딩"/>
-                <a:cs typeface="나눔고딕코딩"/>
+                <a:latin typeface="D2Coding"/>
+                <a:ea typeface="D2Coding"/>
+                <a:cs typeface="D2Coding"/>
               </a:rPr>
               <a:t>2</a:t>
             </a:r>
@@ -34928,9 +34928,9 @@
                 <a:solidFill>
                   <a:srgbClr val="7A869C"/>
                 </a:solidFill>
-                <a:latin typeface="나눔고딕코딩"/>
-                <a:ea typeface="나눔고딕코딩"/>
-                <a:cs typeface="나눔고딕코딩"/>
+                <a:latin typeface="D2Coding"/>
+                <a:ea typeface="D2Coding"/>
+                <a:cs typeface="D2Coding"/>
               </a:rPr>
               <a:t>3</a:t>
             </a:r>
@@ -34946,9 +34946,9 @@
                 <a:solidFill>
                   <a:srgbClr val="7A869C"/>
                 </a:solidFill>
-                <a:latin typeface="나눔고딕코딩"/>
-                <a:ea typeface="나눔고딕코딩"/>
-                <a:cs typeface="나눔고딕코딩"/>
+                <a:latin typeface="D2Coding"/>
+                <a:ea typeface="D2Coding"/>
+                <a:cs typeface="D2Coding"/>
               </a:rPr>
               <a:t>4</a:t>
             </a:r>
@@ -34964,9 +34964,9 @@
                 <a:solidFill>
                   <a:srgbClr val="7A869C"/>
                 </a:solidFill>
-                <a:latin typeface="나눔고딕코딩"/>
-                <a:ea typeface="나눔고딕코딩"/>
-                <a:cs typeface="나눔고딕코딩"/>
+                <a:latin typeface="D2Coding"/>
+                <a:ea typeface="D2Coding"/>
+                <a:cs typeface="D2Coding"/>
               </a:rPr>
               <a:t>5</a:t>
             </a:r>
@@ -34982,9 +34982,9 @@
                 <a:solidFill>
                   <a:srgbClr val="7A869C"/>
                 </a:solidFill>
-                <a:latin typeface="나눔고딕코딩"/>
-                <a:ea typeface="나눔고딕코딩"/>
-                <a:cs typeface="나눔고딕코딩"/>
+                <a:latin typeface="D2Coding"/>
+                <a:ea typeface="D2Coding"/>
+                <a:cs typeface="D2Coding"/>
               </a:rPr>
               <a:t>6</a:t>
             </a:r>
@@ -35023,9 +35023,9 @@
                 <a:solidFill>
                   <a:srgbClr val="E6EAF2"/>
                 </a:solidFill>
-                <a:latin typeface="나눔고딕코딩"/>
-                <a:ea typeface="나눔고딕코딩"/>
-                <a:cs typeface="나눔고딕코딩"/>
+                <a:latin typeface="D2Coding"/>
+                <a:ea typeface="D2Coding"/>
+                <a:cs typeface="D2Coding"/>
               </a:rPr>
               <a:t>CREATE DATABASE IF NOT EXISTS daon</a:t>
             </a:r>
@@ -35041,9 +35041,9 @@
                 <a:solidFill>
                   <a:srgbClr val="E6EAF2"/>
                 </a:solidFill>
-                <a:latin typeface="나눔고딕코딩"/>
-                <a:ea typeface="나눔고딕코딩"/>
-                <a:cs typeface="나눔고딕코딩"/>
+                <a:latin typeface="D2Coding"/>
+                <a:ea typeface="D2Coding"/>
+                <a:cs typeface="D2Coding"/>
               </a:rPr>
               <a:t>  DEFAULT CHARACTER SET utf8mb4;</a:t>
             </a:r>
@@ -35059,9 +35059,9 @@
                 <a:solidFill>
                   <a:srgbClr val="E6EAF2"/>
                 </a:solidFill>
-                <a:latin typeface="나눔고딕코딩"/>
-                <a:ea typeface="나눔고딕코딩"/>
-                <a:cs typeface="나눔고딕코딩"/>
+                <a:latin typeface="D2Coding"/>
+                <a:ea typeface="D2Coding"/>
+                <a:cs typeface="D2Coding"/>
               </a:rPr>
               <a:t>USE daon;</a:t>
             </a:r>
@@ -35077,9 +35077,9 @@
                 <a:solidFill>
                   <a:srgbClr val="E6EAF2"/>
                 </a:solidFill>
-                <a:latin typeface="나눔고딕코딩"/>
-                <a:ea typeface="나눔고딕코딩"/>
-                <a:cs typeface="나눔고딕코딩"/>
+                <a:latin typeface="D2Coding"/>
+                <a:ea typeface="D2Coding"/>
+                <a:cs typeface="D2Coding"/>
               </a:rPr>
               <a:t/>
             </a:r>
@@ -35095,9 +35095,9 @@
                 <a:solidFill>
                   <a:srgbClr val="E6EAF2"/>
                 </a:solidFill>
-                <a:latin typeface="나눔고딕코딩"/>
-                <a:ea typeface="나눔고딕코딩"/>
-                <a:cs typeface="나눔고딕코딩"/>
+                <a:latin typeface="D2Coding"/>
+                <a:ea typeface="D2Coding"/>
+                <a:cs typeface="D2Coding"/>
               </a:rPr>
               <a:t>SHOW DATABASES;</a:t>
             </a:r>
@@ -35113,9 +35113,9 @@
                 <a:solidFill>
                   <a:srgbClr val="E6EAF2"/>
                 </a:solidFill>
-                <a:latin typeface="나눔고딕코딩"/>
-                <a:ea typeface="나눔고딕코딩"/>
-                <a:cs typeface="나눔고딕코딩"/>
+                <a:latin typeface="D2Coding"/>
+                <a:ea typeface="D2Coding"/>
+                <a:cs typeface="D2Coding"/>
               </a:rPr>
               <a:t>SELECT DATABASE();</a:t>
             </a:r>
